--- a/Portfolio_Muhammad_Ulul_Albab.pptx
+++ b/Portfolio_Muhammad_Ulul_Albab.pptx
@@ -14,6 +14,7 @@
     <p:sldId id="262" r:id="rId13"/>
     <p:sldId id="263" r:id="rId14"/>
     <p:sldId id="264" r:id="rId15"/>
+    <p:sldId id="265" r:id="rId16"/>
   </p:sldIdLst>
   <p:sldSz cx="12191695" cy="6858000" type="screen4x3"/>
   <p:notesSz cx="6858000" cy="9144000"/>
@@ -3092,7 +3093,7 @@
     <p:bg>
       <p:bgPr>
         <a:solidFill>
-          <a:srgbClr val="0F172A"/>
+          <a:srgbClr val="FBF8F3"/>
         </a:solidFill>
         <a:effectLst/>
       </p:bgPr>
@@ -3106,25 +3107,23 @@
       <p:grpSpPr/>
       <p:sp>
         <p:nvSpPr>
-          <p:cNvPr id="2" name="Rectangle 1"/>
+          <p:cNvPr id="2" name="Oval 1"/>
           <p:cNvSpPr/>
           <p:nvPr/>
         </p:nvSpPr>
         <p:spPr>
           <a:xfrm>
-            <a:off x="731520" y="2011680"/>
-            <a:ext cx="137160" cy="2926080"/>
-          </a:xfrm>
-          <a:prstGeom prst="rect">
+            <a:off x="7863840" y="-2011680"/>
+            <a:ext cx="6583680" cy="6583680"/>
+          </a:xfrm>
+          <a:prstGeom prst="ellipse">
             <a:avLst/>
           </a:prstGeom>
           <a:solidFill>
-            <a:srgbClr val="06B6D4"/>
+            <a:srgbClr val="FBE9ED"/>
           </a:solidFill>
           <a:ln>
-            <a:solidFill>
-              <a:srgbClr val="06B6D4"/>
-            </a:solidFill>
+            <a:noFill/>
           </a:ln>
         </p:spPr>
         <p:style>
@@ -3151,14 +3150,81 @@
       </p:sp>
       <p:sp>
         <p:nvSpPr>
-          <p:cNvPr id="3" name="TextBox 2"/>
+          <p:cNvPr id="3" name="Oval 2"/>
+          <p:cNvSpPr/>
+          <p:nvPr/>
+        </p:nvSpPr>
+        <p:spPr>
+          <a:xfrm>
+            <a:off x="9875520" y="3200400"/>
+            <a:ext cx="3657600" cy="3657600"/>
+          </a:xfrm>
+          <a:prstGeom prst="ellipse">
+            <a:avLst/>
+          </a:prstGeom>
+          <a:solidFill>
+            <a:srgbClr val="E6F0E8"/>
+          </a:solidFill>
+          <a:ln>
+            <a:noFill/>
+          </a:ln>
+        </p:spPr>
+        <p:style>
+          <a:lnRef idx="1">
+            <a:schemeClr val="accent1"/>
+          </a:lnRef>
+          <a:fillRef idx="3">
+            <a:schemeClr val="accent1"/>
+          </a:fillRef>
+          <a:effectRef idx="2">
+            <a:schemeClr val="accent1"/>
+          </a:effectRef>
+          <a:fontRef idx="minor">
+            <a:schemeClr val="lt1"/>
+          </a:fontRef>
+        </p:style>
+        <p:txBody>
+          <a:bodyPr rtlCol="0" anchor="ctr"/>
+          <a:lstStyle/>
+          <a:p>
+            <a:pPr algn="ctr"/>
+          </a:p>
+        </p:txBody>
+      </p:sp>
+      <p:pic>
+        <p:nvPicPr>
+          <p:cNvPr id="4" name="Picture 3" descr="profile_circle.png"/>
+          <p:cNvPicPr>
+            <a:picLocks noChangeAspect="1"/>
+          </p:cNvPicPr>
+          <p:nvPr/>
+        </p:nvPicPr>
+        <p:blipFill>
+          <a:blip r:embed="rId2"/>
+          <a:stretch>
+            <a:fillRect/>
+          </a:stretch>
+        </p:blipFill>
+        <p:spPr>
+          <a:xfrm>
+            <a:off x="9006840" y="1417320"/>
+            <a:ext cx="3017520" cy="3017520"/>
+          </a:xfrm>
+          <a:prstGeom prst="rect">
+            <a:avLst/>
+          </a:prstGeom>
+        </p:spPr>
+      </p:pic>
+      <p:sp>
+        <p:nvSpPr>
+          <p:cNvPr id="5" name="TextBox 4"/>
           <p:cNvSpPr txBox="1"/>
           <p:nvPr/>
         </p:nvSpPr>
         <p:spPr>
           <a:xfrm>
-            <a:off x="1097280" y="1828800"/>
-            <a:ext cx="10058400" cy="3200400"/>
+            <a:off x="914400" y="2286000"/>
+            <a:ext cx="7863840" cy="3017520"/>
           </a:xfrm>
           <a:prstGeom prst="rect">
             <a:avLst/>
@@ -3174,8 +3240,9 @@
             <a:pPr>
               <a:defRPr sz="1200" b="1">
                 <a:solidFill>
-                  <a:srgbClr val="06B6D4"/>
-                </a:solidFill>
+                  <a:srgbClr val="C4748C"/>
+                </a:solidFill>
+                <a:latin typeface="Arial"/>
               </a:defRPr>
             </a:pPr>
             <a:r>
@@ -3184,10 +3251,14 @@
           </a:p>
           <a:p>
             <a:pPr>
-              <a:defRPr sz="4400" b="1">
-                <a:solidFill>
-                  <a:srgbClr val="F8FAFC"/>
-                </a:solidFill>
+              <a:spcBef>
+                <a:spcPts val="1000"/>
+              </a:spcBef>
+              <a:defRPr sz="4800" b="1">
+                <a:solidFill>
+                  <a:srgbClr val="332F2B"/>
+                </a:solidFill>
+                <a:latin typeface="Arial"/>
               </a:defRPr>
             </a:pPr>
             <a:r>
@@ -3196,10 +3267,14 @@
           </a:p>
           <a:p>
             <a:pPr>
+              <a:spcBef>
+                <a:spcPts val="400"/>
+              </a:spcBef>
               <a:defRPr sz="2200">
                 <a:solidFill>
-                  <a:srgbClr val="94A3B8"/>
-                </a:solidFill>
+                  <a:srgbClr val="8A847C"/>
+                </a:solidFill>
+                <a:latin typeface="Arial"/>
               </a:defRPr>
             </a:pPr>
             <a:r>
@@ -3208,14 +3283,232 @@
           </a:p>
           <a:p>
             <a:pPr>
+              <a:spcBef>
+                <a:spcPts val="1400"/>
+              </a:spcBef>
               <a:defRPr sz="1400" i="1">
                 <a:solidFill>
-                  <a:srgbClr val="06B6D4"/>
-                </a:solidFill>
-              </a:defRPr>
-            </a:pPr>
-            <a:r>
-              <a:t>Perpaduan Ketelitian Analisis Farmasi &amp; Rekayasa Perangkat Lunak Modern</a:t>
+                  <a:srgbClr val="5B8A72"/>
+                </a:solidFill>
+                <a:latin typeface="Arial"/>
+              </a:defRPr>
+            </a:pPr>
+            <a:r>
+              <a:t>Perpaduan ketelitian analisis farmasi &amp; rekayasa perangkat lunak modern</a:t>
+            </a:r>
+          </a:p>
+        </p:txBody>
+      </p:sp>
+    </p:spTree>
+  </p:cSld>
+  <p:clrMapOvr>
+    <a:masterClrMapping/>
+  </p:clrMapOvr>
+</p:sld>
+</file>
+
+<file path=ppt/slides/slide10.xml><?xml version="1.0" encoding="utf-8"?>
+<p:sld xmlns:a="http://schemas.openxmlformats.org/drawingml/2006/main" xmlns:p="http://schemas.openxmlformats.org/presentationml/2006/main" xmlns:r="http://schemas.openxmlformats.org/officeDocument/2006/relationships">
+  <p:cSld>
+    <p:bg>
+      <p:bgPr>
+        <a:solidFill>
+          <a:srgbClr val="FBF8F3"/>
+        </a:solidFill>
+        <a:effectLst/>
+      </p:bgPr>
+    </p:bg>
+    <p:spTree>
+      <p:nvGrpSpPr>
+        <p:cNvPr id="1" name=""/>
+        <p:cNvGrpSpPr/>
+        <p:nvPr/>
+      </p:nvGrpSpPr>
+      <p:grpSpPr/>
+      <p:sp>
+        <p:nvSpPr>
+          <p:cNvPr id="2" name="Oval 1"/>
+          <p:cNvSpPr/>
+          <p:nvPr/>
+        </p:nvSpPr>
+        <p:spPr>
+          <a:xfrm>
+            <a:off x="-2286000" y="-2286000"/>
+            <a:ext cx="5486400" cy="5486400"/>
+          </a:xfrm>
+          <a:prstGeom prst="ellipse">
+            <a:avLst/>
+          </a:prstGeom>
+          <a:solidFill>
+            <a:srgbClr val="ECE7F6"/>
+          </a:solidFill>
+          <a:ln>
+            <a:noFill/>
+          </a:ln>
+        </p:spPr>
+        <p:style>
+          <a:lnRef idx="1">
+            <a:schemeClr val="accent1"/>
+          </a:lnRef>
+          <a:fillRef idx="3">
+            <a:schemeClr val="accent1"/>
+          </a:fillRef>
+          <a:effectRef idx="2">
+            <a:schemeClr val="accent1"/>
+          </a:effectRef>
+          <a:fontRef idx="minor">
+            <a:schemeClr val="lt1"/>
+          </a:fontRef>
+        </p:style>
+        <p:txBody>
+          <a:bodyPr rtlCol="0" anchor="ctr"/>
+          <a:lstStyle/>
+          <a:p>
+            <a:pPr algn="ctr"/>
+          </a:p>
+        </p:txBody>
+      </p:sp>
+      <p:sp>
+        <p:nvSpPr>
+          <p:cNvPr id="3" name="Rounded Rectangle 2"/>
+          <p:cNvSpPr/>
+          <p:nvPr/>
+        </p:nvSpPr>
+        <p:spPr>
+          <a:xfrm>
+            <a:off x="1737360" y="1463040"/>
+            <a:ext cx="8714232" cy="4023360"/>
+          </a:xfrm>
+          <a:prstGeom prst="roundRect">
+            <a:avLst>
+              <a:gd name="adj" fmla="val 6000"/>
+            </a:avLst>
+          </a:prstGeom>
+          <a:solidFill>
+            <a:srgbClr val="FFFFFF"/>
+          </a:solidFill>
+          <a:ln>
+            <a:noFill/>
+          </a:ln>
+          <a:effectLst>
+            <a:outerShdw blurRad="128016" dist="45720" dir="5400000" rotWithShape="0">
+              <a:srgbClr val="4A4038">
+                <a:alpha val="18000"/>
+              </a:srgbClr>
+            </a:outerShdw>
+          </a:effectLst>
+        </p:spPr>
+        <p:style>
+          <a:lnRef idx="1">
+            <a:schemeClr val="accent1"/>
+          </a:lnRef>
+          <a:fillRef idx="3">
+            <a:schemeClr val="accent1"/>
+          </a:fillRef>
+          <a:effectRef idx="2">
+            <a:schemeClr val="accent1"/>
+          </a:effectRef>
+          <a:fontRef idx="minor">
+            <a:schemeClr val="lt1"/>
+          </a:fontRef>
+        </p:style>
+        <p:txBody>
+          <a:bodyPr rtlCol="0" anchor="t" lIns="320040" rIns="320040" tIns="274320"/>
+          <a:lstStyle/>
+          <a:p>
+            <a:pPr algn="ctr">
+              <a:defRPr b="1" sz="3000">
+                <a:solidFill>
+                  <a:srgbClr val="C4748C"/>
+                </a:solidFill>
+                <a:latin typeface="Arial"/>
+              </a:defRPr>
+            </a:pPr>
+            <a:r>
+              <a:t>Mari Berkolaborasi!</a:t>
+            </a:r>
+          </a:p>
+          <a:p>
+            <a:pPr algn="ctr">
+              <a:spcBef>
+                <a:spcPts val="800"/>
+              </a:spcBef>
+              <a:spcAft>
+                <a:spcPts val="2000"/>
+              </a:spcAft>
+              <a:defRPr sz="1400">
+                <a:solidFill>
+                  <a:srgbClr val="8A847C"/>
+                </a:solidFill>
+                <a:latin typeface="Arial"/>
+              </a:defRPr>
+            </a:pPr>
+            <a:r>
+              <a:t>Terbuka untuk proyek freelance, pengembangan sistem kustom, maupun posisi software engineer.</a:t>
+            </a:r>
+          </a:p>
+          <a:p>
+            <a:pPr algn="ctr">
+              <a:spcAft>
+                <a:spcPts val="600"/>
+              </a:spcAft>
+              <a:defRPr sz="1500">
+                <a:solidFill>
+                  <a:srgbClr val="332F2B"/>
+                </a:solidFill>
+                <a:latin typeface="Arial"/>
+              </a:defRPr>
+            </a:pPr>
+            <a:r>
+              <a:t>WhatsApp   : +62 895-4147-81707</a:t>
+            </a:r>
+          </a:p>
+          <a:p>
+            <a:pPr algn="ctr">
+              <a:spcAft>
+                <a:spcPts val="600"/>
+              </a:spcAft>
+              <a:defRPr sz="1500">
+                <a:solidFill>
+                  <a:srgbClr val="332F2B"/>
+                </a:solidFill>
+                <a:latin typeface="Arial"/>
+              </a:defRPr>
+            </a:pPr>
+            <a:r>
+              <a:t>Email          : ulula2812@gmail.com</a:t>
+            </a:r>
+          </a:p>
+          <a:p>
+            <a:pPr algn="ctr">
+              <a:spcAft>
+                <a:spcPts val="600"/>
+              </a:spcAft>
+              <a:defRPr sz="1500">
+                <a:solidFill>
+                  <a:srgbClr val="332F2B"/>
+                </a:solidFill>
+                <a:latin typeface="Arial"/>
+              </a:defRPr>
+            </a:pPr>
+            <a:r>
+              <a:t>Portofolio    : ulul-portofolio-3odd.vercel.app</a:t>
+            </a:r>
+          </a:p>
+          <a:p>
+            <a:pPr algn="ctr">
+              <a:spcAft>
+                <a:spcPts val="600"/>
+              </a:spcAft>
+              <a:defRPr sz="1500">
+                <a:solidFill>
+                  <a:srgbClr val="332F2B"/>
+                </a:solidFill>
+                <a:latin typeface="Arial"/>
+              </a:defRPr>
+            </a:pPr>
+            <a:r>
+              <a:t>Lokasi         : Bogor, Jawa Barat, Indonesia</a:t>
             </a:r>
           </a:p>
         </p:txBody>
@@ -3234,7 +3527,7 @@
     <p:bg>
       <p:bgPr>
         <a:solidFill>
-          <a:srgbClr val="0F172A"/>
+          <a:srgbClr val="FBF8F3"/>
         </a:solidFill>
         <a:effectLst/>
       </p:bgPr>
@@ -3254,8 +3547,8 @@
         </p:nvSpPr>
         <p:spPr>
           <a:xfrm>
-            <a:off x="731520" y="457200"/>
-            <a:ext cx="10728655" cy="914400"/>
+            <a:off x="731520" y="502920"/>
+            <a:ext cx="10698480" cy="1051560"/>
           </a:xfrm>
           <a:prstGeom prst="rect">
             <a:avLst/>
@@ -3271,7 +3564,7 @@
             <a:pPr>
               <a:defRPr sz="1100" b="1">
                 <a:solidFill>
-                  <a:srgbClr val="06B6D4"/>
+                  <a:srgbClr val="C4748C"/>
                 </a:solidFill>
                 <a:latin typeface="Arial"/>
               </a:defRPr>
@@ -3282,9 +3575,12 @@
           </a:p>
           <a:p>
             <a:pPr>
-              <a:defRPr sz="2600" b="1">
-                <a:solidFill>
-                  <a:srgbClr val="F8FAFC"/>
+              <a:spcBef>
+                <a:spcPts val="200"/>
+              </a:spcBef>
+              <a:defRPr sz="2700" b="1">
+                <a:solidFill>
+                  <a:srgbClr val="332F2B"/>
                 </a:solidFill>
                 <a:latin typeface="Arial"/>
               </a:defRPr>
@@ -3303,20 +3599,27 @@
         </p:nvSpPr>
         <p:spPr>
           <a:xfrm>
-            <a:off x="731520" y="1645920"/>
-            <a:ext cx="5120640" cy="4389120"/>
+            <a:off x="731520" y="1737360"/>
+            <a:ext cx="5120640" cy="4297680"/>
           </a:xfrm>
           <a:prstGeom prst="roundRect">
-            <a:avLst/>
+            <a:avLst>
+              <a:gd name="adj" fmla="val 6000"/>
+            </a:avLst>
           </a:prstGeom>
           <a:solidFill>
-            <a:srgbClr val="1E293B"/>
+            <a:srgbClr val="FBE9ED"/>
           </a:solidFill>
           <a:ln>
-            <a:solidFill>
-              <a:srgbClr val="334155"/>
-            </a:solidFill>
+            <a:noFill/>
           </a:ln>
+          <a:effectLst>
+            <a:outerShdw blurRad="128016" dist="45720" dir="5400000" rotWithShape="0">
+              <a:srgbClr val="4A4038">
+                <a:alpha val="18000"/>
+              </a:srgbClr>
+            </a:outerShdw>
+          </a:effectLst>
         </p:spPr>
         <p:style>
           <a:lnRef idx="1">
@@ -3333,68 +3636,32 @@
           </a:fontRef>
         </p:style>
         <p:txBody>
-          <a:bodyPr rtlCol="0" anchor="ctr" wrap="square" lIns="274320" tIns="274320"/>
-          <a:lstStyle/>
-          <a:p>
-            <a:pPr algn="ctr">
-              <a:defRPr b="1" sz="1800">
-                <a:solidFill>
-                  <a:srgbClr val="06B6D4"/>
-                </a:solidFill>
-              </a:defRPr>
-            </a:pPr>
-            <a:r>
-              <a:t>Pendidikan &amp; Fondasi Eksakta</a:t>
-            </a:r>
-          </a:p>
-          <a:p>
-            <a:pPr>
-              <a:defRPr sz="1400">
-                <a:solidFill>
-                  <a:srgbClr val="F8FAFC"/>
-                </a:solidFill>
-              </a:defRPr>
-            </a:pPr>
-            <a:r>
-              <a:t>• Universitas Pakuan — Program Studi Farmasi</a:t>
-            </a:r>
-          </a:p>
-          <a:p>
-            <a:br/>
-            <a:pPr>
-              <a:defRPr sz="1300">
-                <a:solidFill>
-                  <a:srgbClr val="94A3B8"/>
-                </a:solidFill>
-              </a:defRPr>
-            </a:pPr>
-            <a:r>
-              <a:t>Latar belakang Farmasi membentuk ketelitian tinggi, logika eksploratif, serta pola pikir analitis eksakta yang kuat dalam memecahkan masalah kompleks.</a:t>
-            </a:r>
-          </a:p>
-        </p:txBody>
-      </p:sp>
-      <p:sp>
-        <p:nvSpPr>
-          <p:cNvPr id="4" name="Rounded Rectangle 3"/>
+          <a:bodyPr rtlCol="0" anchor="t" lIns="320040" rIns="320040" tIns="274320"/>
+          <a:lstStyle/>
+          <a:p>
+            <a:pPr algn="ctr"/>
+          </a:p>
+        </p:txBody>
+      </p:sp>
+      <p:sp>
+        <p:nvSpPr>
+          <p:cNvPr id="4" name="Oval 3"/>
           <p:cNvSpPr/>
           <p:nvPr/>
         </p:nvSpPr>
         <p:spPr>
           <a:xfrm>
-            <a:off x="6217920" y="1645920"/>
-            <a:ext cx="5212080" cy="4389120"/>
-          </a:xfrm>
-          <a:prstGeom prst="roundRect">
+            <a:off x="1005840" y="2011680"/>
+            <a:ext cx="548640" cy="548640"/>
+          </a:xfrm>
+          <a:prstGeom prst="ellipse">
             <a:avLst/>
           </a:prstGeom>
           <a:solidFill>
-            <a:srgbClr val="1E293B"/>
+            <a:srgbClr val="C4748C"/>
           </a:solidFill>
           <a:ln>
-            <a:solidFill>
-              <a:srgbClr val="334155"/>
-            </a:solidFill>
+            <a:noFill/>
           </a:ln>
         </p:spPr>
         <p:style>
@@ -3412,54 +3679,317 @@
           </a:fontRef>
         </p:style>
         <p:txBody>
-          <a:bodyPr rtlCol="0" anchor="ctr" wrap="square" lIns="274320" tIns="274320"/>
+          <a:bodyPr rtlCol="0" anchor="ctr" lIns="0" rIns="0" tIns="0" bIns="0"/>
           <a:lstStyle/>
           <a:p>
             <a:pPr algn="ctr">
-              <a:defRPr b="1" sz="1800">
-                <a:solidFill>
-                  <a:srgbClr val="F43F5E"/>
-                </a:solidFill>
-              </a:defRPr>
-            </a:pPr>
-            <a:r>
-              <a:t>Transisi Ke Software Engineering</a:t>
-            </a:r>
-          </a:p>
-          <a:p>
-            <a:pPr>
+              <a:defRPr sz="1800">
+                <a:solidFill>
+                  <a:srgbClr val="FFFFFF"/>
+                </a:solidFill>
+              </a:defRPr>
+            </a:pPr>
+            <a:r>
+              <a:t>⚗</a:t>
+            </a:r>
+          </a:p>
+        </p:txBody>
+      </p:sp>
+      <p:sp>
+        <p:nvSpPr>
+          <p:cNvPr id="5" name="TextBox 4"/>
+          <p:cNvSpPr txBox="1"/>
+          <p:nvPr/>
+        </p:nvSpPr>
+        <p:spPr>
+          <a:xfrm>
+            <a:off x="1737360" y="1965960"/>
+            <a:ext cx="3840480" cy="640080"/>
+          </a:xfrm>
+          <a:prstGeom prst="rect">
+            <a:avLst/>
+          </a:prstGeom>
+          <a:noFill/>
+        </p:spPr>
+        <p:txBody>
+          <a:bodyPr wrap="square">
+            <a:spAutoFit/>
+          </a:bodyPr>
+          <a:lstStyle/>
+          <a:p>
+            <a:pPr>
+              <a:defRPr b="1" sz="1600">
+                <a:solidFill>
+                  <a:srgbClr val="332F2B"/>
+                </a:solidFill>
+                <a:latin typeface="Arial"/>
+              </a:defRPr>
+            </a:pPr>
+            <a:r>
+              <a:t>Pendidikan &amp; Fondasi Eksakta</a:t>
+            </a:r>
+          </a:p>
+        </p:txBody>
+      </p:sp>
+      <p:sp>
+        <p:nvSpPr>
+          <p:cNvPr id="6" name="TextBox 5"/>
+          <p:cNvSpPr txBox="1"/>
+          <p:nvPr/>
+        </p:nvSpPr>
+        <p:spPr>
+          <a:xfrm>
+            <a:off x="1051560" y="2788920"/>
+            <a:ext cx="4480560" cy="3017520"/>
+          </a:xfrm>
+          <a:prstGeom prst="rect">
+            <a:avLst/>
+          </a:prstGeom>
+          <a:noFill/>
+        </p:spPr>
+        <p:txBody>
+          <a:bodyPr wrap="square">
+            <a:spAutoFit/>
+          </a:bodyPr>
+          <a:lstStyle/>
+          <a:p>
+            <a:pPr>
+              <a:defRPr sz="1300" b="1">
+                <a:solidFill>
+                  <a:srgbClr val="C4748C"/>
+                </a:solidFill>
+                <a:latin typeface="Arial"/>
+              </a:defRPr>
+            </a:pPr>
+            <a:r>
+              <a:t>Universitas Pakuan — Program Studi Farmasi</a:t>
+            </a:r>
+          </a:p>
+          <a:p>
+            <a:pPr>
+              <a:spcBef>
+                <a:spcPts val="1000"/>
+              </a:spcBef>
               <a:defRPr sz="1300">
                 <a:solidFill>
-                  <a:srgbClr val="94A3B8"/>
-                </a:solidFill>
-              </a:defRPr>
-            </a:pPr>
-            <a:r>
-              <a:t>• Fokus pada pembentukan arsitektur sistem yang bersih, efisien, dan siap pakai di lingkungan cloud.</a:t>
-            </a:r>
-          </a:p>
-          <a:p>
-            <a:pPr>
+                  <a:srgbClr val="8A847C"/>
+                </a:solidFill>
+                <a:latin typeface="Arial"/>
+              </a:defRPr>
+            </a:pPr>
+            <a:r>
+              <a:t>Latar belakang Farmasi membentuk ketelitian tinggi, logika eksploratif, serta pola pikir analitis eksakta yang kuat dalam memecahkan masalah kompleks.</a:t>
+            </a:r>
+          </a:p>
+        </p:txBody>
+      </p:sp>
+      <p:sp>
+        <p:nvSpPr>
+          <p:cNvPr id="7" name="Rounded Rectangle 6"/>
+          <p:cNvSpPr/>
+          <p:nvPr/>
+        </p:nvSpPr>
+        <p:spPr>
+          <a:xfrm>
+            <a:off x="6309360" y="1737360"/>
+            <a:ext cx="5120640" cy="4297680"/>
+          </a:xfrm>
+          <a:prstGeom prst="roundRect">
+            <a:avLst>
+              <a:gd name="adj" fmla="val 6000"/>
+            </a:avLst>
+          </a:prstGeom>
+          <a:solidFill>
+            <a:srgbClr val="E6F0E8"/>
+          </a:solidFill>
+          <a:ln>
+            <a:noFill/>
+          </a:ln>
+          <a:effectLst>
+            <a:outerShdw blurRad="128016" dist="45720" dir="5400000" rotWithShape="0">
+              <a:srgbClr val="4A4038">
+                <a:alpha val="18000"/>
+              </a:srgbClr>
+            </a:outerShdw>
+          </a:effectLst>
+        </p:spPr>
+        <p:style>
+          <a:lnRef idx="1">
+            <a:schemeClr val="accent1"/>
+          </a:lnRef>
+          <a:fillRef idx="3">
+            <a:schemeClr val="accent1"/>
+          </a:fillRef>
+          <a:effectRef idx="2">
+            <a:schemeClr val="accent1"/>
+          </a:effectRef>
+          <a:fontRef idx="minor">
+            <a:schemeClr val="lt1"/>
+          </a:fontRef>
+        </p:style>
+        <p:txBody>
+          <a:bodyPr rtlCol="0" anchor="t" lIns="320040" rIns="320040" tIns="274320"/>
+          <a:lstStyle/>
+          <a:p>
+            <a:pPr algn="ctr"/>
+          </a:p>
+        </p:txBody>
+      </p:sp>
+      <p:sp>
+        <p:nvSpPr>
+          <p:cNvPr id="8" name="Oval 7"/>
+          <p:cNvSpPr/>
+          <p:nvPr/>
+        </p:nvSpPr>
+        <p:spPr>
+          <a:xfrm>
+            <a:off x="6583680" y="2011680"/>
+            <a:ext cx="548640" cy="548640"/>
+          </a:xfrm>
+          <a:prstGeom prst="ellipse">
+            <a:avLst/>
+          </a:prstGeom>
+          <a:solidFill>
+            <a:srgbClr val="5B8A72"/>
+          </a:solidFill>
+          <a:ln>
+            <a:noFill/>
+          </a:ln>
+        </p:spPr>
+        <p:style>
+          <a:lnRef idx="1">
+            <a:schemeClr val="accent1"/>
+          </a:lnRef>
+          <a:fillRef idx="3">
+            <a:schemeClr val="accent1"/>
+          </a:fillRef>
+          <a:effectRef idx="2">
+            <a:schemeClr val="accent1"/>
+          </a:effectRef>
+          <a:fontRef idx="minor">
+            <a:schemeClr val="lt1"/>
+          </a:fontRef>
+        </p:style>
+        <p:txBody>
+          <a:bodyPr rtlCol="0" anchor="ctr" lIns="0" rIns="0" tIns="0" bIns="0"/>
+          <a:lstStyle/>
+          <a:p>
+            <a:pPr algn="ctr">
+              <a:defRPr sz="1800">
+                <a:solidFill>
+                  <a:srgbClr val="FFFFFF"/>
+                </a:solidFill>
+              </a:defRPr>
+            </a:pPr>
+            <a:r>
+              <a:t>⚙</a:t>
+            </a:r>
+          </a:p>
+        </p:txBody>
+      </p:sp>
+      <p:sp>
+        <p:nvSpPr>
+          <p:cNvPr id="9" name="TextBox 8"/>
+          <p:cNvSpPr txBox="1"/>
+          <p:nvPr/>
+        </p:nvSpPr>
+        <p:spPr>
+          <a:xfrm>
+            <a:off x="7315200" y="1965960"/>
+            <a:ext cx="3840480" cy="640080"/>
+          </a:xfrm>
+          <a:prstGeom prst="rect">
+            <a:avLst/>
+          </a:prstGeom>
+          <a:noFill/>
+        </p:spPr>
+        <p:txBody>
+          <a:bodyPr wrap="square">
+            <a:spAutoFit/>
+          </a:bodyPr>
+          <a:lstStyle/>
+          <a:p>
+            <a:pPr>
+              <a:defRPr b="1" sz="1600">
+                <a:solidFill>
+                  <a:srgbClr val="332F2B"/>
+                </a:solidFill>
+                <a:latin typeface="Arial"/>
+              </a:defRPr>
+            </a:pPr>
+            <a:r>
+              <a:t>Transisi ke Software Engineering</a:t>
+            </a:r>
+          </a:p>
+        </p:txBody>
+      </p:sp>
+      <p:sp>
+        <p:nvSpPr>
+          <p:cNvPr id="10" name="TextBox 9"/>
+          <p:cNvSpPr txBox="1"/>
+          <p:nvPr/>
+        </p:nvSpPr>
+        <p:spPr>
+          <a:xfrm>
+            <a:off x="6629400" y="2788920"/>
+            <a:ext cx="4480560" cy="3017520"/>
+          </a:xfrm>
+          <a:prstGeom prst="rect">
+            <a:avLst/>
+          </a:prstGeom>
+          <a:noFill/>
+        </p:spPr>
+        <p:txBody>
+          <a:bodyPr wrap="square">
+            <a:spAutoFit/>
+          </a:bodyPr>
+          <a:lstStyle/>
+          <a:p>
+            <a:pPr>
+              <a:spcAft>
+                <a:spcPts val="1000"/>
+              </a:spcAft>
               <a:defRPr sz="1300">
                 <a:solidFill>
-                  <a:srgbClr val="94A3B8"/>
-                </a:solidFill>
-              </a:defRPr>
-            </a:pPr>
-            <a:r>
-              <a:t>• Menguasai pemecahan masalah teknis end-to-end: dari profil memori PyTorch/Docker hingga optimasi database.</a:t>
-            </a:r>
-          </a:p>
-          <a:p>
-            <a:pPr>
+                  <a:srgbClr val="8A847C"/>
+                </a:solidFill>
+                <a:latin typeface="Arial"/>
+              </a:defRPr>
+            </a:pPr>
+            <a:r>
+              <a:t>•  Fokus pada pembentukan arsitektur sistem yang bersih, efisien, dan siap pakai di lingkungan cloud.</a:t>
+            </a:r>
+          </a:p>
+          <a:p>
+            <a:pPr>
+              <a:spcAft>
+                <a:spcPts val="1000"/>
+              </a:spcAft>
               <a:defRPr sz="1300">
                 <a:solidFill>
-                  <a:srgbClr val="94A3B8"/>
-                </a:solidFill>
-              </a:defRPr>
-            </a:pPr>
-            <a:r>
-              <a:t>• Komitmen pada pembelajaran berkelanjutan tanpa ragu menghadapi tantangan teknologi baru.</a:t>
+                  <a:srgbClr val="8A847C"/>
+                </a:solidFill>
+                <a:latin typeface="Arial"/>
+              </a:defRPr>
+            </a:pPr>
+            <a:r>
+              <a:t>•  Menguasai pemecahan masalah teknis end-to-end: dari profil memori PyTorch/Docker hingga optimasi database.</a:t>
+            </a:r>
+          </a:p>
+          <a:p>
+            <a:pPr>
+              <a:spcAft>
+                <a:spcPts val="1000"/>
+              </a:spcAft>
+              <a:defRPr sz="1300">
+                <a:solidFill>
+                  <a:srgbClr val="8A847C"/>
+                </a:solidFill>
+                <a:latin typeface="Arial"/>
+              </a:defRPr>
+            </a:pPr>
+            <a:r>
+              <a:t>•  Komitmen pada pembelajaran berkelanjutan tanpa ragu menghadapi tantangan teknologi baru.</a:t>
             </a:r>
           </a:p>
         </p:txBody>
@@ -3478,7 +4008,7 @@
     <p:bg>
       <p:bgPr>
         <a:solidFill>
-          <a:srgbClr val="0F172A"/>
+          <a:srgbClr val="FBF8F3"/>
         </a:solidFill>
         <a:effectLst/>
       </p:bgPr>
@@ -3498,8 +4028,8 @@
         </p:nvSpPr>
         <p:spPr>
           <a:xfrm>
-            <a:off x="731520" y="457200"/>
-            <a:ext cx="10728655" cy="914400"/>
+            <a:off x="731520" y="502920"/>
+            <a:ext cx="10698480" cy="1051560"/>
           </a:xfrm>
           <a:prstGeom prst="rect">
             <a:avLst/>
@@ -3515,7 +4045,7 @@
             <a:pPr>
               <a:defRPr sz="1100" b="1">
                 <a:solidFill>
-                  <a:srgbClr val="06B6D4"/>
+                  <a:srgbClr val="7C6DA8"/>
                 </a:solidFill>
                 <a:latin typeface="Arial"/>
               </a:defRPr>
@@ -3526,9 +4056,12 @@
           </a:p>
           <a:p>
             <a:pPr>
-              <a:defRPr sz="2600" b="1">
-                <a:solidFill>
-                  <a:srgbClr val="F8FAFC"/>
+              <a:spcBef>
+                <a:spcPts val="200"/>
+              </a:spcBef>
+              <a:defRPr sz="2700" b="1">
+                <a:solidFill>
+                  <a:srgbClr val="332F2B"/>
                 </a:solidFill>
                 <a:latin typeface="Arial"/>
               </a:defRPr>
@@ -3547,20 +4080,27 @@
         </p:nvSpPr>
         <p:spPr>
           <a:xfrm>
-            <a:off x="731520" y="1645920"/>
-            <a:ext cx="5212080" cy="2011680"/>
+            <a:off x="731520" y="1828800"/>
+            <a:ext cx="5120640" cy="1965960"/>
           </a:xfrm>
           <a:prstGeom prst="roundRect">
-            <a:avLst/>
+            <a:avLst>
+              <a:gd name="adj" fmla="val 6000"/>
+            </a:avLst>
           </a:prstGeom>
           <a:solidFill>
-            <a:srgbClr val="1E293B"/>
+            <a:srgbClr val="E3F1EF"/>
           </a:solidFill>
           <a:ln>
-            <a:solidFill>
-              <a:srgbClr val="334155"/>
-            </a:solidFill>
+            <a:noFill/>
           </a:ln>
+          <a:effectLst>
+            <a:outerShdw blurRad="128016" dist="45720" dir="5400000" rotWithShape="0">
+              <a:srgbClr val="4A4038">
+                <a:alpha val="18000"/>
+              </a:srgbClr>
+            </a:outerShdw>
+          </a:effectLst>
         </p:spPr>
         <p:style>
           <a:lnRef idx="1">
@@ -3577,55 +4117,32 @@
           </a:fontRef>
         </p:style>
         <p:txBody>
-          <a:bodyPr rtlCol="0" anchor="ctr" wrap="square" lIns="274320" tIns="182880"/>
-          <a:lstStyle/>
-          <a:p>
-            <a:pPr algn="ctr">
-              <a:defRPr b="1" sz="1600">
-                <a:solidFill>
-                  <a:srgbClr val="06B6D4"/>
-                </a:solidFill>
-              </a:defRPr>
-            </a:pPr>
-            <a:r>
-              <a:t>Frontend &amp; Mobile</a:t>
-            </a:r>
-          </a:p>
-          <a:p>
-            <a:pPr>
-              <a:defRPr sz="1300">
-                <a:solidFill>
-                  <a:srgbClr val="F8FAFC"/>
-                </a:solidFill>
-              </a:defRPr>
-            </a:pPr>
-            <a:r>
-              <a:t>React, React Native, Expo SDK 54, Tailwind CSS, Vite, HTML/JS</a:t>
-            </a:r>
-          </a:p>
-        </p:txBody>
-      </p:sp>
-      <p:sp>
-        <p:nvSpPr>
-          <p:cNvPr id="4" name="Rounded Rectangle 3"/>
+          <a:bodyPr rtlCol="0" anchor="t" lIns="320040" rIns="320040" tIns="274320"/>
+          <a:lstStyle/>
+          <a:p>
+            <a:pPr algn="ctr"/>
+          </a:p>
+        </p:txBody>
+      </p:sp>
+      <p:sp>
+        <p:nvSpPr>
+          <p:cNvPr id="4" name="Oval 3"/>
           <p:cNvSpPr/>
           <p:nvPr/>
         </p:nvSpPr>
         <p:spPr>
           <a:xfrm>
-            <a:off x="6217920" y="1645920"/>
-            <a:ext cx="5212080" cy="2011680"/>
-          </a:xfrm>
-          <a:prstGeom prst="roundRect">
+            <a:off x="1005840" y="2103120"/>
+            <a:ext cx="548640" cy="548640"/>
+          </a:xfrm>
+          <a:prstGeom prst="ellipse">
             <a:avLst/>
           </a:prstGeom>
           <a:solidFill>
-            <a:srgbClr val="1E293B"/>
+            <a:srgbClr val="3F8B8C"/>
           </a:solidFill>
           <a:ln>
-            <a:solidFill>
-              <a:srgbClr val="334155"/>
-            </a:solidFill>
+            <a:noFill/>
           </a:ln>
         </p:spPr>
         <p:style>
@@ -3643,56 +4160,103 @@
           </a:fontRef>
         </p:style>
         <p:txBody>
-          <a:bodyPr rtlCol="0" anchor="ctr" wrap="square" lIns="274320" tIns="182880"/>
+          <a:bodyPr rtlCol="0" anchor="ctr" lIns="0" rIns="0" tIns="0" bIns="0"/>
           <a:lstStyle/>
           <a:p>
             <a:pPr algn="ctr">
+              <a:defRPr sz="1800">
+                <a:solidFill>
+                  <a:srgbClr val="FFFFFF"/>
+                </a:solidFill>
+              </a:defRPr>
+            </a:pPr>
+            <a:r>
+              <a:t>▣</a:t>
+            </a:r>
+          </a:p>
+        </p:txBody>
+      </p:sp>
+      <p:sp>
+        <p:nvSpPr>
+          <p:cNvPr id="5" name="TextBox 4"/>
+          <p:cNvSpPr txBox="1"/>
+          <p:nvPr/>
+        </p:nvSpPr>
+        <p:spPr>
+          <a:xfrm>
+            <a:off x="1691640" y="2029968"/>
+            <a:ext cx="3931920" cy="1554480"/>
+          </a:xfrm>
+          <a:prstGeom prst="rect">
+            <a:avLst/>
+          </a:prstGeom>
+          <a:noFill/>
+        </p:spPr>
+        <p:txBody>
+          <a:bodyPr wrap="square">
+            <a:spAutoFit/>
+          </a:bodyPr>
+          <a:lstStyle/>
+          <a:p>
+            <a:pPr>
               <a:defRPr b="1" sz="1600">
                 <a:solidFill>
-                  <a:srgbClr val="F43F5E"/>
-                </a:solidFill>
-              </a:defRPr>
-            </a:pPr>
-            <a:r>
-              <a:t>Backend &amp; API</a:t>
-            </a:r>
-          </a:p>
-          <a:p>
-            <a:pPr>
-              <a:defRPr sz="1300">
-                <a:solidFill>
-                  <a:srgbClr val="F8FAFC"/>
-                </a:solidFill>
-              </a:defRPr>
-            </a:pPr>
-            <a:r>
-              <a:t>FastAPI (Python), Laravel 11 (PHP), Node.js / Express, Firebase</a:t>
-            </a:r>
-          </a:p>
-        </p:txBody>
-      </p:sp>
-      <p:sp>
-        <p:nvSpPr>
-          <p:cNvPr id="5" name="Rounded Rectangle 4"/>
+                  <a:srgbClr val="332F2B"/>
+                </a:solidFill>
+                <a:latin typeface="Arial"/>
+              </a:defRPr>
+            </a:pPr>
+            <a:r>
+              <a:t>Frontend &amp; Mobile</a:t>
+            </a:r>
+          </a:p>
+          <a:p>
+            <a:pPr>
+              <a:spcBef>
+                <a:spcPts val="600"/>
+              </a:spcBef>
+              <a:defRPr sz="1250">
+                <a:solidFill>
+                  <a:srgbClr val="8A847C"/>
+                </a:solidFill>
+                <a:latin typeface="Arial"/>
+              </a:defRPr>
+            </a:pPr>
+            <a:r>
+              <a:t>React, React Native, Expo SDK 54, Tailwind CSS, Vite, HTML/JS</a:t>
+            </a:r>
+          </a:p>
+        </p:txBody>
+      </p:sp>
+      <p:sp>
+        <p:nvSpPr>
+          <p:cNvPr id="6" name="Rounded Rectangle 5"/>
           <p:cNvSpPr/>
           <p:nvPr/>
         </p:nvSpPr>
         <p:spPr>
           <a:xfrm>
-            <a:off x="731520" y="3931920"/>
-            <a:ext cx="5212080" cy="2011680"/>
+            <a:off x="6309360" y="1828800"/>
+            <a:ext cx="5120640" cy="1965960"/>
           </a:xfrm>
           <a:prstGeom prst="roundRect">
-            <a:avLst/>
+            <a:avLst>
+              <a:gd name="adj" fmla="val 6000"/>
+            </a:avLst>
           </a:prstGeom>
           <a:solidFill>
-            <a:srgbClr val="1E293B"/>
+            <a:srgbClr val="FBE9ED"/>
           </a:solidFill>
           <a:ln>
-            <a:solidFill>
-              <a:srgbClr val="334155"/>
-            </a:solidFill>
+            <a:noFill/>
           </a:ln>
+          <a:effectLst>
+            <a:outerShdw blurRad="128016" dist="45720" dir="5400000" rotWithShape="0">
+              <a:srgbClr val="4A4038">
+                <a:alpha val="18000"/>
+              </a:srgbClr>
+            </a:outerShdw>
+          </a:effectLst>
         </p:spPr>
         <p:style>
           <a:lnRef idx="1">
@@ -3709,55 +4273,32 @@
           </a:fontRef>
         </p:style>
         <p:txBody>
-          <a:bodyPr rtlCol="0" anchor="ctr" wrap="square" lIns="274320" tIns="182880"/>
-          <a:lstStyle/>
-          <a:p>
-            <a:pPr algn="ctr">
-              <a:defRPr b="1" sz="1600">
-                <a:solidFill>
-                  <a:srgbClr val="8B5CF6"/>
-                </a:solidFill>
-              </a:defRPr>
-            </a:pPr>
-            <a:r>
-              <a:t>AI &amp; Data Intelligence</a:t>
-            </a:r>
-          </a:p>
-          <a:p>
-            <a:pPr>
-              <a:defRPr sz="1300">
-                <a:solidFill>
-                  <a:srgbClr val="F8FAFC"/>
-                </a:solidFill>
-              </a:defRPr>
-            </a:pPr>
-            <a:r>
-              <a:t>Gemini RAG API, PyTorch, SentenceTransformers, pgvector</a:t>
-            </a:r>
-          </a:p>
-        </p:txBody>
-      </p:sp>
-      <p:sp>
-        <p:nvSpPr>
-          <p:cNvPr id="6" name="Rounded Rectangle 5"/>
+          <a:bodyPr rtlCol="0" anchor="t" lIns="320040" rIns="320040" tIns="274320"/>
+          <a:lstStyle/>
+          <a:p>
+            <a:pPr algn="ctr"/>
+          </a:p>
+        </p:txBody>
+      </p:sp>
+      <p:sp>
+        <p:nvSpPr>
+          <p:cNvPr id="7" name="Oval 6"/>
           <p:cNvSpPr/>
           <p:nvPr/>
         </p:nvSpPr>
         <p:spPr>
           <a:xfrm>
-            <a:off x="6217920" y="3931920"/>
-            <a:ext cx="5212080" cy="2011680"/>
-          </a:xfrm>
-          <a:prstGeom prst="roundRect">
+            <a:off x="6583680" y="2103120"/>
+            <a:ext cx="548640" cy="548640"/>
+          </a:xfrm>
+          <a:prstGeom prst="ellipse">
             <a:avLst/>
           </a:prstGeom>
           <a:solidFill>
-            <a:srgbClr val="1E293B"/>
+            <a:srgbClr val="C4748C"/>
           </a:solidFill>
           <a:ln>
-            <a:solidFill>
-              <a:srgbClr val="334155"/>
-            </a:solidFill>
+            <a:noFill/>
           </a:ln>
         </p:spPr>
         <p:style>
@@ -3775,14 +4316,362 @@
           </a:fontRef>
         </p:style>
         <p:txBody>
-          <a:bodyPr rtlCol="0" anchor="ctr" wrap="square" lIns="274320" tIns="182880"/>
+          <a:bodyPr rtlCol="0" anchor="ctr" lIns="0" rIns="0" tIns="0" bIns="0"/>
           <a:lstStyle/>
           <a:p>
             <a:pPr algn="ctr">
+              <a:defRPr sz="1800">
+                <a:solidFill>
+                  <a:srgbClr val="FFFFFF"/>
+                </a:solidFill>
+              </a:defRPr>
+            </a:pPr>
+            <a:r>
+              <a:t>▢</a:t>
+            </a:r>
+          </a:p>
+        </p:txBody>
+      </p:sp>
+      <p:sp>
+        <p:nvSpPr>
+          <p:cNvPr id="8" name="TextBox 7"/>
+          <p:cNvSpPr txBox="1"/>
+          <p:nvPr/>
+        </p:nvSpPr>
+        <p:spPr>
+          <a:xfrm>
+            <a:off x="7269480" y="2029968"/>
+            <a:ext cx="3931920" cy="1554480"/>
+          </a:xfrm>
+          <a:prstGeom prst="rect">
+            <a:avLst/>
+          </a:prstGeom>
+          <a:noFill/>
+        </p:spPr>
+        <p:txBody>
+          <a:bodyPr wrap="square">
+            <a:spAutoFit/>
+          </a:bodyPr>
+          <a:lstStyle/>
+          <a:p>
+            <a:pPr>
               <a:defRPr b="1" sz="1600">
                 <a:solidFill>
-                  <a:srgbClr val="10B981"/>
-                </a:solidFill>
+                  <a:srgbClr val="332F2B"/>
+                </a:solidFill>
+                <a:latin typeface="Arial"/>
+              </a:defRPr>
+            </a:pPr>
+            <a:r>
+              <a:t>Backend &amp; API</a:t>
+            </a:r>
+          </a:p>
+          <a:p>
+            <a:pPr>
+              <a:spcBef>
+                <a:spcPts val="600"/>
+              </a:spcBef>
+              <a:defRPr sz="1250">
+                <a:solidFill>
+                  <a:srgbClr val="8A847C"/>
+                </a:solidFill>
+                <a:latin typeface="Arial"/>
+              </a:defRPr>
+            </a:pPr>
+            <a:r>
+              <a:t>FastAPI (Python), Laravel 11 (PHP), Node.js/Express, Firebase</a:t>
+            </a:r>
+          </a:p>
+        </p:txBody>
+      </p:sp>
+      <p:sp>
+        <p:nvSpPr>
+          <p:cNvPr id="9" name="Rounded Rectangle 8"/>
+          <p:cNvSpPr/>
+          <p:nvPr/>
+        </p:nvSpPr>
+        <p:spPr>
+          <a:xfrm>
+            <a:off x="731520" y="4114800"/>
+            <a:ext cx="5120640" cy="1965960"/>
+          </a:xfrm>
+          <a:prstGeom prst="roundRect">
+            <a:avLst>
+              <a:gd name="adj" fmla="val 6000"/>
+            </a:avLst>
+          </a:prstGeom>
+          <a:solidFill>
+            <a:srgbClr val="ECE7F6"/>
+          </a:solidFill>
+          <a:ln>
+            <a:noFill/>
+          </a:ln>
+          <a:effectLst>
+            <a:outerShdw blurRad="128016" dist="45720" dir="5400000" rotWithShape="0">
+              <a:srgbClr val="4A4038">
+                <a:alpha val="18000"/>
+              </a:srgbClr>
+            </a:outerShdw>
+          </a:effectLst>
+        </p:spPr>
+        <p:style>
+          <a:lnRef idx="1">
+            <a:schemeClr val="accent1"/>
+          </a:lnRef>
+          <a:fillRef idx="3">
+            <a:schemeClr val="accent1"/>
+          </a:fillRef>
+          <a:effectRef idx="2">
+            <a:schemeClr val="accent1"/>
+          </a:effectRef>
+          <a:fontRef idx="minor">
+            <a:schemeClr val="lt1"/>
+          </a:fontRef>
+        </p:style>
+        <p:txBody>
+          <a:bodyPr rtlCol="0" anchor="t" lIns="320040" rIns="320040" tIns="274320"/>
+          <a:lstStyle/>
+          <a:p>
+            <a:pPr algn="ctr"/>
+          </a:p>
+        </p:txBody>
+      </p:sp>
+      <p:sp>
+        <p:nvSpPr>
+          <p:cNvPr id="10" name="Oval 9"/>
+          <p:cNvSpPr/>
+          <p:nvPr/>
+        </p:nvSpPr>
+        <p:spPr>
+          <a:xfrm>
+            <a:off x="1005840" y="4389120"/>
+            <a:ext cx="548640" cy="548640"/>
+          </a:xfrm>
+          <a:prstGeom prst="ellipse">
+            <a:avLst/>
+          </a:prstGeom>
+          <a:solidFill>
+            <a:srgbClr val="7C6DA8"/>
+          </a:solidFill>
+          <a:ln>
+            <a:noFill/>
+          </a:ln>
+        </p:spPr>
+        <p:style>
+          <a:lnRef idx="1">
+            <a:schemeClr val="accent1"/>
+          </a:lnRef>
+          <a:fillRef idx="3">
+            <a:schemeClr val="accent1"/>
+          </a:fillRef>
+          <a:effectRef idx="2">
+            <a:schemeClr val="accent1"/>
+          </a:effectRef>
+          <a:fontRef idx="minor">
+            <a:schemeClr val="lt1"/>
+          </a:fontRef>
+        </p:style>
+        <p:txBody>
+          <a:bodyPr rtlCol="0" anchor="ctr" lIns="0" rIns="0" tIns="0" bIns="0"/>
+          <a:lstStyle/>
+          <a:p>
+            <a:pPr algn="ctr">
+              <a:defRPr sz="1800">
+                <a:solidFill>
+                  <a:srgbClr val="FFFFFF"/>
+                </a:solidFill>
+              </a:defRPr>
+            </a:pPr>
+            <a:r>
+              <a:t>◈</a:t>
+            </a:r>
+          </a:p>
+        </p:txBody>
+      </p:sp>
+      <p:sp>
+        <p:nvSpPr>
+          <p:cNvPr id="11" name="TextBox 10"/>
+          <p:cNvSpPr txBox="1"/>
+          <p:nvPr/>
+        </p:nvSpPr>
+        <p:spPr>
+          <a:xfrm>
+            <a:off x="1691640" y="4315968"/>
+            <a:ext cx="3931920" cy="1554480"/>
+          </a:xfrm>
+          <a:prstGeom prst="rect">
+            <a:avLst/>
+          </a:prstGeom>
+          <a:noFill/>
+        </p:spPr>
+        <p:txBody>
+          <a:bodyPr wrap="square">
+            <a:spAutoFit/>
+          </a:bodyPr>
+          <a:lstStyle/>
+          <a:p>
+            <a:pPr>
+              <a:defRPr b="1" sz="1600">
+                <a:solidFill>
+                  <a:srgbClr val="332F2B"/>
+                </a:solidFill>
+                <a:latin typeface="Arial"/>
+              </a:defRPr>
+            </a:pPr>
+            <a:r>
+              <a:t>AI &amp; Data Intelligence</a:t>
+            </a:r>
+          </a:p>
+          <a:p>
+            <a:pPr>
+              <a:spcBef>
+                <a:spcPts val="600"/>
+              </a:spcBef>
+              <a:defRPr sz="1250">
+                <a:solidFill>
+                  <a:srgbClr val="8A847C"/>
+                </a:solidFill>
+                <a:latin typeface="Arial"/>
+              </a:defRPr>
+            </a:pPr>
+            <a:r>
+              <a:t>Gemini RAG API, PyTorch, SentenceTransformers, pgvector</a:t>
+            </a:r>
+          </a:p>
+        </p:txBody>
+      </p:sp>
+      <p:sp>
+        <p:nvSpPr>
+          <p:cNvPr id="12" name="Rounded Rectangle 11"/>
+          <p:cNvSpPr/>
+          <p:nvPr/>
+        </p:nvSpPr>
+        <p:spPr>
+          <a:xfrm>
+            <a:off x="6309360" y="4114800"/>
+            <a:ext cx="5120640" cy="1965960"/>
+          </a:xfrm>
+          <a:prstGeom prst="roundRect">
+            <a:avLst>
+              <a:gd name="adj" fmla="val 6000"/>
+            </a:avLst>
+          </a:prstGeom>
+          <a:solidFill>
+            <a:srgbClr val="E6F0E8"/>
+          </a:solidFill>
+          <a:ln>
+            <a:noFill/>
+          </a:ln>
+          <a:effectLst>
+            <a:outerShdw blurRad="128016" dist="45720" dir="5400000" rotWithShape="0">
+              <a:srgbClr val="4A4038">
+                <a:alpha val="18000"/>
+              </a:srgbClr>
+            </a:outerShdw>
+          </a:effectLst>
+        </p:spPr>
+        <p:style>
+          <a:lnRef idx="1">
+            <a:schemeClr val="accent1"/>
+          </a:lnRef>
+          <a:fillRef idx="3">
+            <a:schemeClr val="accent1"/>
+          </a:fillRef>
+          <a:effectRef idx="2">
+            <a:schemeClr val="accent1"/>
+          </a:effectRef>
+          <a:fontRef idx="minor">
+            <a:schemeClr val="lt1"/>
+          </a:fontRef>
+        </p:style>
+        <p:txBody>
+          <a:bodyPr rtlCol="0" anchor="t" lIns="320040" rIns="320040" tIns="274320"/>
+          <a:lstStyle/>
+          <a:p>
+            <a:pPr algn="ctr"/>
+          </a:p>
+        </p:txBody>
+      </p:sp>
+      <p:sp>
+        <p:nvSpPr>
+          <p:cNvPr id="13" name="Oval 12"/>
+          <p:cNvSpPr/>
+          <p:nvPr/>
+        </p:nvSpPr>
+        <p:spPr>
+          <a:xfrm>
+            <a:off x="6583680" y="4389120"/>
+            <a:ext cx="548640" cy="548640"/>
+          </a:xfrm>
+          <a:prstGeom prst="ellipse">
+            <a:avLst/>
+          </a:prstGeom>
+          <a:solidFill>
+            <a:srgbClr val="5B8A72"/>
+          </a:solidFill>
+          <a:ln>
+            <a:noFill/>
+          </a:ln>
+        </p:spPr>
+        <p:style>
+          <a:lnRef idx="1">
+            <a:schemeClr val="accent1"/>
+          </a:lnRef>
+          <a:fillRef idx="3">
+            <a:schemeClr val="accent1"/>
+          </a:fillRef>
+          <a:effectRef idx="2">
+            <a:schemeClr val="accent1"/>
+          </a:effectRef>
+          <a:fontRef idx="minor">
+            <a:schemeClr val="lt1"/>
+          </a:fontRef>
+        </p:style>
+        <p:txBody>
+          <a:bodyPr rtlCol="0" anchor="ctr" lIns="0" rIns="0" tIns="0" bIns="0"/>
+          <a:lstStyle/>
+          <a:p>
+            <a:pPr algn="ctr">
+              <a:defRPr sz="1800">
+                <a:solidFill>
+                  <a:srgbClr val="FFFFFF"/>
+                </a:solidFill>
+              </a:defRPr>
+            </a:pPr>
+            <a:r>
+              <a:t>◉</a:t>
+            </a:r>
+          </a:p>
+        </p:txBody>
+      </p:sp>
+      <p:sp>
+        <p:nvSpPr>
+          <p:cNvPr id="14" name="TextBox 13"/>
+          <p:cNvSpPr txBox="1"/>
+          <p:nvPr/>
+        </p:nvSpPr>
+        <p:spPr>
+          <a:xfrm>
+            <a:off x="7269480" y="4315968"/>
+            <a:ext cx="3931920" cy="1554480"/>
+          </a:xfrm>
+          <a:prstGeom prst="rect">
+            <a:avLst/>
+          </a:prstGeom>
+          <a:noFill/>
+        </p:spPr>
+        <p:txBody>
+          <a:bodyPr wrap="square">
+            <a:spAutoFit/>
+          </a:bodyPr>
+          <a:lstStyle/>
+          <a:p>
+            <a:pPr>
+              <a:defRPr b="1" sz="1600">
+                <a:solidFill>
+                  <a:srgbClr val="332F2B"/>
+                </a:solidFill>
+                <a:latin typeface="Arial"/>
               </a:defRPr>
             </a:pPr>
             <a:r>
@@ -3791,10 +4680,14 @@
           </a:p>
           <a:p>
             <a:pPr>
-              <a:defRPr sz="1300">
-                <a:solidFill>
-                  <a:srgbClr val="F8FAFC"/>
-                </a:solidFill>
+              <a:spcBef>
+                <a:spcPts val="600"/>
+              </a:spcBef>
+              <a:defRPr sz="1250">
+                <a:solidFill>
+                  <a:srgbClr val="8A847C"/>
+                </a:solidFill>
+                <a:latin typeface="Arial"/>
               </a:defRPr>
             </a:pPr>
             <a:r>
@@ -3817,7 +4710,7 @@
     <p:bg>
       <p:bgPr>
         <a:solidFill>
-          <a:srgbClr val="0F172A"/>
+          <a:srgbClr val="FBF8F3"/>
         </a:solidFill>
         <a:effectLst/>
       </p:bgPr>
@@ -3837,8 +4730,8 @@
         </p:nvSpPr>
         <p:spPr>
           <a:xfrm>
-            <a:off x="731520" y="457200"/>
-            <a:ext cx="10728655" cy="914400"/>
+            <a:off x="731520" y="502920"/>
+            <a:ext cx="10698480" cy="1051560"/>
           </a:xfrm>
           <a:prstGeom prst="rect">
             <a:avLst/>
@@ -3854,7 +4747,7 @@
             <a:pPr>
               <a:defRPr sz="1100" b="1">
                 <a:solidFill>
-                  <a:srgbClr val="06B6D4"/>
+                  <a:srgbClr val="3F8B8C"/>
                 </a:solidFill>
                 <a:latin typeface="Arial"/>
               </a:defRPr>
@@ -3865,9 +4758,12 @@
           </a:p>
           <a:p>
             <a:pPr>
-              <a:defRPr sz="2600" b="1">
-                <a:solidFill>
-                  <a:srgbClr val="F8FAFC"/>
+              <a:spcBef>
+                <a:spcPts val="200"/>
+              </a:spcBef>
+              <a:defRPr sz="2700" b="1">
+                <a:solidFill>
+                  <a:srgbClr val="332F2B"/>
                 </a:solidFill>
                 <a:latin typeface="Arial"/>
               </a:defRPr>
@@ -3886,20 +4782,27 @@
         </p:nvSpPr>
         <p:spPr>
           <a:xfrm>
-            <a:off x="731520" y="1645920"/>
-            <a:ext cx="10728655" cy="4389120"/>
+            <a:off x="731520" y="1737360"/>
+            <a:ext cx="7345375" cy="4297680"/>
           </a:xfrm>
           <a:prstGeom prst="roundRect">
-            <a:avLst/>
+            <a:avLst>
+              <a:gd name="adj" fmla="val 6000"/>
+            </a:avLst>
           </a:prstGeom>
           <a:solidFill>
-            <a:srgbClr val="1E293B"/>
+            <a:srgbClr val="E3F1EF"/>
           </a:solidFill>
           <a:ln>
-            <a:solidFill>
-              <a:srgbClr val="2563EB"/>
-            </a:solidFill>
+            <a:noFill/>
           </a:ln>
+          <a:effectLst>
+            <a:outerShdw blurRad="128016" dist="45720" dir="5400000" rotWithShape="0">
+              <a:srgbClr val="4A4038">
+                <a:alpha val="18000"/>
+              </a:srgbClr>
+            </a:outerShdw>
+          </a:effectLst>
         </p:spPr>
         <p:style>
           <a:lnRef idx="1">
@@ -3916,39 +4819,148 @@
           </a:fontRef>
         </p:style>
         <p:txBody>
-          <a:bodyPr rtlCol="0" anchor="ctr" wrap="square" lIns="365760" tIns="274320"/>
+          <a:bodyPr rtlCol="0" anchor="t" lIns="320040" rIns="320040" tIns="274320"/>
+          <a:lstStyle/>
+          <a:p>
+            <a:pPr algn="ctr"/>
+          </a:p>
+        </p:txBody>
+      </p:sp>
+      <p:sp>
+        <p:nvSpPr>
+          <p:cNvPr id="4" name="Oval 3"/>
+          <p:cNvSpPr/>
+          <p:nvPr/>
+        </p:nvSpPr>
+        <p:spPr>
+          <a:xfrm>
+            <a:off x="1005840" y="1965960"/>
+            <a:ext cx="502920" cy="502920"/>
+          </a:xfrm>
+          <a:prstGeom prst="ellipse">
+            <a:avLst/>
+          </a:prstGeom>
+          <a:solidFill>
+            <a:srgbClr val="3F8B8C"/>
+          </a:solidFill>
+          <a:ln>
+            <a:noFill/>
+          </a:ln>
+        </p:spPr>
+        <p:style>
+          <a:lnRef idx="1">
+            <a:schemeClr val="accent1"/>
+          </a:lnRef>
+          <a:fillRef idx="3">
+            <a:schemeClr val="accent1"/>
+          </a:fillRef>
+          <a:effectRef idx="2">
+            <a:schemeClr val="accent1"/>
+          </a:effectRef>
+          <a:fontRef idx="minor">
+            <a:schemeClr val="lt1"/>
+          </a:fontRef>
+        </p:style>
+        <p:txBody>
+          <a:bodyPr rtlCol="0" anchor="ctr" lIns="0" rIns="0" tIns="0" bIns="0"/>
           <a:lstStyle/>
           <a:p>
             <a:pPr algn="ctr">
-              <a:defRPr b="1" sz="1800">
-                <a:solidFill>
-                  <a:srgbClr val="2563EB"/>
-                </a:solidFill>
+              <a:defRPr sz="1800">
+                <a:solidFill>
+                  <a:srgbClr val="FFFFFF"/>
+                </a:solidFill>
+              </a:defRPr>
+            </a:pPr>
+            <a:r>
+              <a:t>⌗</a:t>
+            </a:r>
+          </a:p>
+        </p:txBody>
+      </p:sp>
+      <p:sp>
+        <p:nvSpPr>
+          <p:cNvPr id="5" name="TextBox 4"/>
+          <p:cNvSpPr txBox="1"/>
+          <p:nvPr/>
+        </p:nvSpPr>
+        <p:spPr>
+          <a:xfrm>
+            <a:off x="1691640" y="1938528"/>
+            <a:ext cx="6339535" cy="777240"/>
+          </a:xfrm>
+          <a:prstGeom prst="rect">
+            <a:avLst/>
+          </a:prstGeom>
+          <a:noFill/>
+        </p:spPr>
+        <p:txBody>
+          <a:bodyPr wrap="square">
+            <a:spAutoFit/>
+          </a:bodyPr>
+          <a:lstStyle/>
+          <a:p>
+            <a:pPr>
+              <a:defRPr b="1" sz="1600">
+                <a:solidFill>
+                  <a:srgbClr val="332F2B"/>
+                </a:solidFill>
+                <a:latin typeface="Arial"/>
               </a:defRPr>
             </a:pPr>
             <a:r>
               <a:t>Sistem Pengelolaan &amp; Komunikasi Sekolah Terpadu 3 Peran (Android &amp; Web)</a:t>
             </a:r>
           </a:p>
-          <a:p>
-            <a:pPr>
-              <a:defRPr sz="1200" b="1">
-                <a:solidFill>
-                  <a:srgbClr val="06B6D4"/>
-                </a:solidFill>
+        </p:txBody>
+      </p:sp>
+      <p:sp>
+        <p:nvSpPr>
+          <p:cNvPr id="6" name="TextBox 5"/>
+          <p:cNvSpPr txBox="1"/>
+          <p:nvPr/>
+        </p:nvSpPr>
+        <p:spPr>
+          <a:xfrm>
+            <a:off x="1051560" y="2880360"/>
+            <a:ext cx="6796735" cy="3017520"/>
+          </a:xfrm>
+          <a:prstGeom prst="rect">
+            <a:avLst/>
+          </a:prstGeom>
+          <a:noFill/>
+        </p:spPr>
+        <p:txBody>
+          <a:bodyPr wrap="square">
+            <a:spAutoFit/>
+          </a:bodyPr>
+          <a:lstStyle/>
+          <a:p>
+            <a:pPr>
+              <a:spcAft>
+                <a:spcPts val="800"/>
+              </a:spcAft>
+              <a:defRPr sz="1150" b="1">
+                <a:solidFill>
+                  <a:srgbClr val="3F8B8C"/>
+                </a:solidFill>
+                <a:latin typeface="Arial"/>
               </a:defRPr>
             </a:pPr>
             <a:r>
               <a:t>Tech Stack: React Native (Expo SDK 54), Firebase Firestore/Auth, React, Vite, Tailwind CSS v4, Vercel</a:t>
             </a:r>
-            <a:br/>
-          </a:p>
-          <a:p>
-            <a:pPr>
-              <a:defRPr sz="1300">
-                <a:solidFill>
-                  <a:srgbClr val="F8FAFC"/>
-                </a:solidFill>
+          </a:p>
+          <a:p>
+            <a:pPr>
+              <a:spcAft>
+                <a:spcPts val="700"/>
+              </a:spcAft>
+              <a:defRPr sz="1200">
+                <a:solidFill>
+                  <a:srgbClr val="332F2B"/>
+                </a:solidFill>
+                <a:latin typeface="Arial"/>
               </a:defRPr>
             </a:pPr>
             <a:r>
@@ -3957,10 +4969,14 @@
           </a:p>
           <a:p>
             <a:pPr>
-              <a:defRPr sz="1300">
-                <a:solidFill>
-                  <a:srgbClr val="F8FAFC"/>
-                </a:solidFill>
+              <a:spcAft>
+                <a:spcPts val="700"/>
+              </a:spcAft>
+              <a:defRPr sz="1200">
+                <a:solidFill>
+                  <a:srgbClr val="332F2B"/>
+                </a:solidFill>
+                <a:latin typeface="Arial"/>
               </a:defRPr>
             </a:pPr>
             <a:r>
@@ -3969,10 +4985,14 @@
           </a:p>
           <a:p>
             <a:pPr>
-              <a:defRPr sz="1300">
-                <a:solidFill>
-                  <a:srgbClr val="F8FAFC"/>
-                </a:solidFill>
+              <a:spcAft>
+                <a:spcPts val="700"/>
+              </a:spcAft>
+              <a:defRPr sz="1200">
+                <a:solidFill>
+                  <a:srgbClr val="332F2B"/>
+                </a:solidFill>
+                <a:latin typeface="Arial"/>
               </a:defRPr>
             </a:pPr>
             <a:r>
@@ -3981,18 +5001,98 @@
           </a:p>
           <a:p>
             <a:pPr>
-              <a:defRPr sz="1300">
-                <a:solidFill>
-                  <a:srgbClr val="F8FAFC"/>
-                </a:solidFill>
-              </a:defRPr>
-            </a:pPr>
-            <a:r>
-              <a:t>✓  Landing Page &amp; Conversion: Landing page khusus Vercel terintegrasi ke WhatsApp (+62895414781707) untuk permintaan demo.</a:t>
-            </a:r>
-          </a:p>
-        </p:txBody>
-      </p:sp>
+              <a:spcAft>
+                <a:spcPts val="700"/>
+              </a:spcAft>
+              <a:defRPr sz="1200">
+                <a:solidFill>
+                  <a:srgbClr val="332F2B"/>
+                </a:solidFill>
+                <a:latin typeface="Arial"/>
+              </a:defRPr>
+            </a:pPr>
+            <a:r>
+              <a:t>✓  Landing Page &amp; Conversion: Landing page khusus Vercel terintegrasi ke WhatsApp untuk permintaan demo.</a:t>
+            </a:r>
+          </a:p>
+        </p:txBody>
+      </p:sp>
+      <p:sp>
+        <p:nvSpPr>
+          <p:cNvPr id="7" name="Rounded Rectangle 6"/>
+          <p:cNvSpPr/>
+          <p:nvPr/>
+        </p:nvSpPr>
+        <p:spPr>
+          <a:xfrm>
+            <a:off x="8879959" y="1737360"/>
+            <a:ext cx="2051470" cy="4297680"/>
+          </a:xfrm>
+          <a:prstGeom prst="roundRect">
+            <a:avLst>
+              <a:gd name="adj" fmla="val 4000"/>
+            </a:avLst>
+          </a:prstGeom>
+          <a:solidFill>
+            <a:srgbClr val="FFFFFF"/>
+          </a:solidFill>
+          <a:ln>
+            <a:noFill/>
+          </a:ln>
+          <a:effectLst>
+            <a:outerShdw blurRad="109728" dist="36576" dir="5400000" rotWithShape="0">
+              <a:srgbClr val="4A4038">
+                <a:alpha val="22000"/>
+              </a:srgbClr>
+            </a:outerShdw>
+          </a:effectLst>
+        </p:spPr>
+        <p:style>
+          <a:lnRef idx="1">
+            <a:schemeClr val="accent1"/>
+          </a:lnRef>
+          <a:fillRef idx="3">
+            <a:schemeClr val="accent1"/>
+          </a:fillRef>
+          <a:effectRef idx="2">
+            <a:schemeClr val="accent1"/>
+          </a:effectRef>
+          <a:fontRef idx="minor">
+            <a:schemeClr val="lt1"/>
+          </a:fontRef>
+        </p:style>
+        <p:txBody>
+          <a:bodyPr rtlCol="0" anchor="ctr"/>
+          <a:lstStyle/>
+          <a:p>
+            <a:pPr algn="ctr"/>
+          </a:p>
+        </p:txBody>
+      </p:sp>
+      <p:pic>
+        <p:nvPicPr>
+          <p:cNvPr id="8" name="Picture 7" descr="project7.jpg"/>
+          <p:cNvPicPr>
+            <a:picLocks noChangeAspect="1"/>
+          </p:cNvPicPr>
+          <p:nvPr/>
+        </p:nvPicPr>
+        <p:blipFill>
+          <a:blip r:embed="rId2"/>
+          <a:stretch>
+            <a:fillRect/>
+          </a:stretch>
+        </p:blipFill>
+        <p:spPr>
+          <a:xfrm>
+            <a:off x="8989687" y="1847088"/>
+            <a:ext cx="1832014" cy="4078224"/>
+          </a:xfrm>
+          <a:prstGeom prst="rect">
+            <a:avLst/>
+          </a:prstGeom>
+        </p:spPr>
+      </p:pic>
     </p:spTree>
   </p:cSld>
   <p:clrMapOvr>
@@ -4007,7 +5107,7 @@
     <p:bg>
       <p:bgPr>
         <a:solidFill>
-          <a:srgbClr val="0F172A"/>
+          <a:srgbClr val="FBF8F3"/>
         </a:solidFill>
         <a:effectLst/>
       </p:bgPr>
@@ -4027,8 +5127,8 @@
         </p:nvSpPr>
         <p:spPr>
           <a:xfrm>
-            <a:off x="731520" y="457200"/>
-            <a:ext cx="10728655" cy="914400"/>
+            <a:off x="731520" y="502920"/>
+            <a:ext cx="10698480" cy="1051560"/>
           </a:xfrm>
           <a:prstGeom prst="rect">
             <a:avLst/>
@@ -4044,7 +5144,7 @@
             <a:pPr>
               <a:defRPr sz="1100" b="1">
                 <a:solidFill>
-                  <a:srgbClr val="06B6D4"/>
+                  <a:srgbClr val="C4748C"/>
                 </a:solidFill>
                 <a:latin typeface="Arial"/>
               </a:defRPr>
@@ -4055,9 +5155,12 @@
           </a:p>
           <a:p>
             <a:pPr>
-              <a:defRPr sz="2600" b="1">
-                <a:solidFill>
-                  <a:srgbClr val="F8FAFC"/>
+              <a:spcBef>
+                <a:spcPts val="200"/>
+              </a:spcBef>
+              <a:defRPr sz="2700" b="1">
+                <a:solidFill>
+                  <a:srgbClr val="332F2B"/>
                 </a:solidFill>
                 <a:latin typeface="Arial"/>
               </a:defRPr>
@@ -4076,20 +5179,27 @@
         </p:nvSpPr>
         <p:spPr>
           <a:xfrm>
-            <a:off x="731520" y="1645920"/>
-            <a:ext cx="10728655" cy="4389120"/>
+            <a:off x="731520" y="1737360"/>
+            <a:ext cx="6248095" cy="4297680"/>
           </a:xfrm>
           <a:prstGeom prst="roundRect">
-            <a:avLst/>
+            <a:avLst>
+              <a:gd name="adj" fmla="val 6000"/>
+            </a:avLst>
           </a:prstGeom>
           <a:solidFill>
-            <a:srgbClr val="1E293B"/>
+            <a:srgbClr val="FBE9ED"/>
           </a:solidFill>
           <a:ln>
-            <a:solidFill>
-              <a:srgbClr val="F43F5E"/>
-            </a:solidFill>
+            <a:noFill/>
           </a:ln>
+          <a:effectLst>
+            <a:outerShdw blurRad="128016" dist="45720" dir="5400000" rotWithShape="0">
+              <a:srgbClr val="4A4038">
+                <a:alpha val="18000"/>
+              </a:srgbClr>
+            </a:outerShdw>
+          </a:effectLst>
         </p:spPr>
         <p:style>
           <a:lnRef idx="1">
@@ -4106,39 +5216,148 @@
           </a:fontRef>
         </p:style>
         <p:txBody>
-          <a:bodyPr rtlCol="0" anchor="ctr" wrap="square" lIns="365760" tIns="274320"/>
+          <a:bodyPr rtlCol="0" anchor="t" lIns="320040" rIns="320040" tIns="274320"/>
+          <a:lstStyle/>
+          <a:p>
+            <a:pPr algn="ctr"/>
+          </a:p>
+        </p:txBody>
+      </p:sp>
+      <p:sp>
+        <p:nvSpPr>
+          <p:cNvPr id="4" name="Oval 3"/>
+          <p:cNvSpPr/>
+          <p:nvPr/>
+        </p:nvSpPr>
+        <p:spPr>
+          <a:xfrm>
+            <a:off x="1005840" y="1965960"/>
+            <a:ext cx="502920" cy="502920"/>
+          </a:xfrm>
+          <a:prstGeom prst="ellipse">
+            <a:avLst/>
+          </a:prstGeom>
+          <a:solidFill>
+            <a:srgbClr val="C4748C"/>
+          </a:solidFill>
+          <a:ln>
+            <a:noFill/>
+          </a:ln>
+        </p:spPr>
+        <p:style>
+          <a:lnRef idx="1">
+            <a:schemeClr val="accent1"/>
+          </a:lnRef>
+          <a:fillRef idx="3">
+            <a:schemeClr val="accent1"/>
+          </a:fillRef>
+          <a:effectRef idx="2">
+            <a:schemeClr val="accent1"/>
+          </a:effectRef>
+          <a:fontRef idx="minor">
+            <a:schemeClr val="lt1"/>
+          </a:fontRef>
+        </p:style>
+        <p:txBody>
+          <a:bodyPr rtlCol="0" anchor="ctr" lIns="0" rIns="0" tIns="0" bIns="0"/>
           <a:lstStyle/>
           <a:p>
             <a:pPr algn="ctr">
-              <a:defRPr b="1" sz="1800">
-                <a:solidFill>
-                  <a:srgbClr val="F43F5E"/>
-                </a:solidFill>
+              <a:defRPr sz="1800">
+                <a:solidFill>
+                  <a:srgbClr val="FFFFFF"/>
+                </a:solidFill>
+              </a:defRPr>
+            </a:pPr>
+            <a:r>
+              <a:t>⚙</a:t>
+            </a:r>
+          </a:p>
+        </p:txBody>
+      </p:sp>
+      <p:sp>
+        <p:nvSpPr>
+          <p:cNvPr id="5" name="TextBox 4"/>
+          <p:cNvSpPr txBox="1"/>
+          <p:nvPr/>
+        </p:nvSpPr>
+        <p:spPr>
+          <a:xfrm>
+            <a:off x="1691640" y="1938528"/>
+            <a:ext cx="5242255" cy="548640"/>
+          </a:xfrm>
+          <a:prstGeom prst="rect">
+            <a:avLst/>
+          </a:prstGeom>
+          <a:noFill/>
+        </p:spPr>
+        <p:txBody>
+          <a:bodyPr wrap="square">
+            <a:spAutoFit/>
+          </a:bodyPr>
+          <a:lstStyle/>
+          <a:p>
+            <a:pPr>
+              <a:defRPr b="1" sz="1600">
+                <a:solidFill>
+                  <a:srgbClr val="332F2B"/>
+                </a:solidFill>
+                <a:latin typeface="Arial"/>
               </a:defRPr>
             </a:pPr>
             <a:r>
               <a:t>Mesin Rekomendasi Aroma Vector Search &amp; RAG AI (Dockerized)</a:t>
             </a:r>
           </a:p>
-          <a:p>
-            <a:pPr>
-              <a:defRPr sz="1200" b="1">
-                <a:solidFill>
-                  <a:srgbClr val="06B6D4"/>
-                </a:solidFill>
+        </p:txBody>
+      </p:sp>
+      <p:sp>
+        <p:nvSpPr>
+          <p:cNvPr id="6" name="TextBox 5"/>
+          <p:cNvSpPr txBox="1"/>
+          <p:nvPr/>
+        </p:nvSpPr>
+        <p:spPr>
+          <a:xfrm>
+            <a:off x="1051560" y="2697480"/>
+            <a:ext cx="5699455" cy="3200400"/>
+          </a:xfrm>
+          <a:prstGeom prst="rect">
+            <a:avLst/>
+          </a:prstGeom>
+          <a:noFill/>
+        </p:spPr>
+        <p:txBody>
+          <a:bodyPr wrap="square">
+            <a:spAutoFit/>
+          </a:bodyPr>
+          <a:lstStyle/>
+          <a:p>
+            <a:pPr>
+              <a:spcAft>
+                <a:spcPts val="800"/>
+              </a:spcAft>
+              <a:defRPr sz="1150" b="1">
+                <a:solidFill>
+                  <a:srgbClr val="C4748C"/>
+                </a:solidFill>
+                <a:latin typeface="Arial"/>
               </a:defRPr>
             </a:pPr>
             <a:r>
               <a:t>Tech Stack: FastAPI (Python), PyTorch, SentenceTransformers, pgvector (PostgreSQL), Docker, Gemini 2.5 Flash API</a:t>
             </a:r>
-            <a:br/>
-          </a:p>
-          <a:p>
-            <a:pPr>
-              <a:defRPr sz="1300">
-                <a:solidFill>
-                  <a:srgbClr val="F8FAFC"/>
-                </a:solidFill>
+          </a:p>
+          <a:p>
+            <a:pPr>
+              <a:spcAft>
+                <a:spcPts val="700"/>
+              </a:spcAft>
+              <a:defRPr sz="1200">
+                <a:solidFill>
+                  <a:srgbClr val="332F2B"/>
+                </a:solidFill>
+                <a:latin typeface="Arial"/>
               </a:defRPr>
             </a:pPr>
             <a:r>
@@ -4147,10 +5366,14 @@
           </a:p>
           <a:p>
             <a:pPr>
-              <a:defRPr sz="1300">
-                <a:solidFill>
-                  <a:srgbClr val="F8FAFC"/>
-                </a:solidFill>
+              <a:spcAft>
+                <a:spcPts val="700"/>
+              </a:spcAft>
+              <a:defRPr sz="1200">
+                <a:solidFill>
+                  <a:srgbClr val="332F2B"/>
+                </a:solidFill>
+                <a:latin typeface="Arial"/>
               </a:defRPr>
             </a:pPr>
             <a:r>
@@ -4159,10 +5382,14 @@
           </a:p>
           <a:p>
             <a:pPr>
-              <a:defRPr sz="1300">
-                <a:solidFill>
-                  <a:srgbClr val="F8FAFC"/>
-                </a:solidFill>
+              <a:spcAft>
+                <a:spcPts val="700"/>
+              </a:spcAft>
+              <a:defRPr sz="1200">
+                <a:solidFill>
+                  <a:srgbClr val="332F2B"/>
+                </a:solidFill>
+                <a:latin typeface="Arial"/>
               </a:defRPr>
             </a:pPr>
             <a:r>
@@ -4171,10 +5398,14 @@
           </a:p>
           <a:p>
             <a:pPr>
-              <a:defRPr sz="1300">
-                <a:solidFill>
-                  <a:srgbClr val="F8FAFC"/>
-                </a:solidFill>
+              <a:spcAft>
+                <a:spcPts val="700"/>
+              </a:spcAft>
+              <a:defRPr sz="1200">
+                <a:solidFill>
+                  <a:srgbClr val="332F2B"/>
+                </a:solidFill>
+                <a:latin typeface="Arial"/>
               </a:defRPr>
             </a:pPr>
             <a:r>
@@ -4183,6 +5414,82 @@
           </a:p>
         </p:txBody>
       </p:sp>
+      <p:sp>
+        <p:nvSpPr>
+          <p:cNvPr id="7" name="Rounded Rectangle 6"/>
+          <p:cNvSpPr/>
+          <p:nvPr/>
+        </p:nvSpPr>
+        <p:spPr>
+          <a:xfrm>
+            <a:off x="7280735" y="1737360"/>
+            <a:ext cx="4152638" cy="4297680"/>
+          </a:xfrm>
+          <a:prstGeom prst="roundRect">
+            <a:avLst>
+              <a:gd name="adj" fmla="val 4000"/>
+            </a:avLst>
+          </a:prstGeom>
+          <a:solidFill>
+            <a:srgbClr val="FFFFFF"/>
+          </a:solidFill>
+          <a:ln>
+            <a:noFill/>
+          </a:ln>
+          <a:effectLst>
+            <a:outerShdw blurRad="109728" dist="36576" dir="5400000" rotWithShape="0">
+              <a:srgbClr val="4A4038">
+                <a:alpha val="22000"/>
+              </a:srgbClr>
+            </a:outerShdw>
+          </a:effectLst>
+        </p:spPr>
+        <p:style>
+          <a:lnRef idx="1">
+            <a:schemeClr val="accent1"/>
+          </a:lnRef>
+          <a:fillRef idx="3">
+            <a:schemeClr val="accent1"/>
+          </a:fillRef>
+          <a:effectRef idx="2">
+            <a:schemeClr val="accent1"/>
+          </a:effectRef>
+          <a:fontRef idx="minor">
+            <a:schemeClr val="lt1"/>
+          </a:fontRef>
+        </p:style>
+        <p:txBody>
+          <a:bodyPr rtlCol="0" anchor="ctr"/>
+          <a:lstStyle/>
+          <a:p>
+            <a:pPr algn="ctr"/>
+          </a:p>
+        </p:txBody>
+      </p:sp>
+      <p:pic>
+        <p:nvPicPr>
+          <p:cNvPr id="8" name="Picture 7" descr="project4.jpg"/>
+          <p:cNvPicPr>
+            <a:picLocks noChangeAspect="1"/>
+          </p:cNvPicPr>
+          <p:nvPr/>
+        </p:nvPicPr>
+        <p:blipFill>
+          <a:blip r:embed="rId2"/>
+          <a:stretch>
+            <a:fillRect/>
+          </a:stretch>
+        </p:blipFill>
+        <p:spPr>
+          <a:xfrm>
+            <a:off x="7390463" y="1847088"/>
+            <a:ext cx="3933182" cy="4078224"/>
+          </a:xfrm>
+          <a:prstGeom prst="rect">
+            <a:avLst/>
+          </a:prstGeom>
+        </p:spPr>
+      </p:pic>
     </p:spTree>
   </p:cSld>
   <p:clrMapOvr>
@@ -4197,7 +5504,7 @@
     <p:bg>
       <p:bgPr>
         <a:solidFill>
-          <a:srgbClr val="0F172A"/>
+          <a:srgbClr val="FBF8F3"/>
         </a:solidFill>
         <a:effectLst/>
       </p:bgPr>
@@ -4217,8 +5524,8 @@
         </p:nvSpPr>
         <p:spPr>
           <a:xfrm>
-            <a:off x="731520" y="457200"/>
-            <a:ext cx="10728655" cy="914400"/>
+            <a:off x="731520" y="502920"/>
+            <a:ext cx="10698480" cy="1051560"/>
           </a:xfrm>
           <a:prstGeom prst="rect">
             <a:avLst/>
@@ -4234,7 +5541,7 @@
             <a:pPr>
               <a:defRPr sz="1100" b="1">
                 <a:solidFill>
-                  <a:srgbClr val="06B6D4"/>
+                  <a:srgbClr val="7C6DA8"/>
                 </a:solidFill>
                 <a:latin typeface="Arial"/>
               </a:defRPr>
@@ -4245,9 +5552,12 @@
           </a:p>
           <a:p>
             <a:pPr>
-              <a:defRPr sz="2600" b="1">
-                <a:solidFill>
-                  <a:srgbClr val="F8FAFC"/>
+              <a:spcBef>
+                <a:spcPts val="200"/>
+              </a:spcBef>
+              <a:defRPr sz="2700" b="1">
+                <a:solidFill>
+                  <a:srgbClr val="332F2B"/>
                 </a:solidFill>
                 <a:latin typeface="Arial"/>
               </a:defRPr>
@@ -4266,20 +5576,27 @@
         </p:nvSpPr>
         <p:spPr>
           <a:xfrm>
-            <a:off x="731520" y="1645920"/>
-            <a:ext cx="5120640" cy="4389120"/>
+            <a:off x="731520" y="1737360"/>
+            <a:ext cx="5120640" cy="4297680"/>
           </a:xfrm>
           <a:prstGeom prst="roundRect">
-            <a:avLst/>
+            <a:avLst>
+              <a:gd name="adj" fmla="val 6000"/>
+            </a:avLst>
           </a:prstGeom>
           <a:solidFill>
-            <a:srgbClr val="1E293B"/>
+            <a:srgbClr val="ECE7F6"/>
           </a:solidFill>
           <a:ln>
-            <a:solidFill>
-              <a:srgbClr val="8B5CF6"/>
-            </a:solidFill>
+            <a:noFill/>
           </a:ln>
+          <a:effectLst>
+            <a:outerShdw blurRad="128016" dist="45720" dir="5400000" rotWithShape="0">
+              <a:srgbClr val="4A4038">
+                <a:alpha val="18000"/>
+              </a:srgbClr>
+            </a:outerShdw>
+          </a:effectLst>
         </p:spPr>
         <p:style>
           <a:lnRef idx="1">
@@ -4296,104 +5613,32 @@
           </a:fontRef>
         </p:style>
         <p:txBody>
-          <a:bodyPr rtlCol="0" anchor="ctr" wrap="square" lIns="274320" tIns="274320"/>
-          <a:lstStyle/>
-          <a:p>
-            <a:pPr algn="ctr">
-              <a:defRPr b="1" sz="1600">
-                <a:solidFill>
-                  <a:srgbClr val="8B5CF6"/>
-                </a:solidFill>
-              </a:defRPr>
-            </a:pPr>
-            <a:r>
-              <a:t>PodLearn AI — Podcast &amp; Quiz</a:t>
-            </a:r>
-          </a:p>
-          <a:p>
-            <a:pPr>
-              <a:defRPr sz="1200">
-                <a:solidFill>
-                  <a:srgbClr val="94A3B8"/>
-                </a:solidFill>
-              </a:defRPr>
-            </a:pPr>
-            <a:r>
-              <a:t>Mengubah file PDF/teks menjadi audio podcast 2 orang (Host &amp; Expert) secara otomatis.</a:t>
-            </a:r>
-            <a:br/>
-          </a:p>
-          <a:p>
-            <a:pPr>
-              <a:defRPr sz="1200">
-                <a:solidFill>
-                  <a:srgbClr val="F8FAFC"/>
-                </a:solidFill>
-              </a:defRPr>
-            </a:pPr>
-            <a:r>
-              <a:t>• Integrasi Gemini AI untuk naskah dialog.</a:t>
-            </a:r>
-          </a:p>
-          <a:p>
-            <a:pPr>
-              <a:defRPr sz="1200">
-                <a:solidFill>
-                  <a:srgbClr val="F8FAFC"/>
-                </a:solidFill>
-              </a:defRPr>
-            </a:pPr>
-            <a:r>
-              <a:t>• Microsoft Edge Neural TTS multi-suara.</a:t>
-            </a:r>
-          </a:p>
-          <a:p>
-            <a:pPr>
-              <a:defRPr sz="1200">
-                <a:solidFill>
-                  <a:srgbClr val="F8FAFC"/>
-                </a:solidFill>
-              </a:defRPr>
-            </a:pPr>
-            <a:r>
-              <a:t>• FFmpeg Concat untuk penggabungan audio.</a:t>
-            </a:r>
-          </a:p>
-          <a:p>
-            <a:pPr>
-              <a:defRPr sz="1200">
-                <a:solidFill>
-                  <a:srgbClr val="F8FAFC"/>
-                </a:solidFill>
-              </a:defRPr>
-            </a:pPr>
-            <a:r>
-              <a:t>• Generator 10 kuis evaluasi interaktif.</a:t>
-            </a:r>
-          </a:p>
-        </p:txBody>
-      </p:sp>
-      <p:sp>
-        <p:nvSpPr>
-          <p:cNvPr id="4" name="Rounded Rectangle 3"/>
+          <a:bodyPr rtlCol="0" anchor="t" lIns="320040" rIns="320040" tIns="274320"/>
+          <a:lstStyle/>
+          <a:p>
+            <a:pPr algn="ctr"/>
+          </a:p>
+        </p:txBody>
+      </p:sp>
+      <p:sp>
+        <p:nvSpPr>
+          <p:cNvPr id="4" name="Oval 3"/>
           <p:cNvSpPr/>
           <p:nvPr/>
         </p:nvSpPr>
         <p:spPr>
           <a:xfrm>
-            <a:off x="6217920" y="1645920"/>
-            <a:ext cx="5212080" cy="4389120"/>
-          </a:xfrm>
-          <a:prstGeom prst="roundRect">
+            <a:off x="1005840" y="2011680"/>
+            <a:ext cx="548640" cy="548640"/>
+          </a:xfrm>
+          <a:prstGeom prst="ellipse">
             <a:avLst/>
           </a:prstGeom>
           <a:solidFill>
-            <a:srgbClr val="1E293B"/>
+            <a:srgbClr val="7C6DA8"/>
           </a:solidFill>
           <a:ln>
-            <a:solidFill>
-              <a:srgbClr val="8B5CF6"/>
-            </a:solidFill>
+            <a:noFill/>
           </a:ln>
         </p:spPr>
         <p:style>
@@ -4411,79 +5656,415 @@
           </a:fontRef>
         </p:style>
         <p:txBody>
-          <a:bodyPr rtlCol="0" anchor="ctr" wrap="square" lIns="274320" tIns="274320"/>
+          <a:bodyPr rtlCol="0" anchor="ctr" lIns="0" rIns="0" tIns="0" bIns="0"/>
           <a:lstStyle/>
           <a:p>
             <a:pPr algn="ctr">
+              <a:defRPr sz="1800">
+                <a:solidFill>
+                  <a:srgbClr val="FFFFFF"/>
+                </a:solidFill>
+              </a:defRPr>
+            </a:pPr>
+            <a:r>
+              <a:t>♫</a:t>
+            </a:r>
+          </a:p>
+        </p:txBody>
+      </p:sp>
+      <p:sp>
+        <p:nvSpPr>
+          <p:cNvPr id="5" name="TextBox 4"/>
+          <p:cNvSpPr txBox="1"/>
+          <p:nvPr/>
+        </p:nvSpPr>
+        <p:spPr>
+          <a:xfrm>
+            <a:off x="1737360" y="1965960"/>
+            <a:ext cx="3931920" cy="548640"/>
+          </a:xfrm>
+          <a:prstGeom prst="rect">
+            <a:avLst/>
+          </a:prstGeom>
+          <a:noFill/>
+        </p:spPr>
+        <p:txBody>
+          <a:bodyPr wrap="square">
+            <a:spAutoFit/>
+          </a:bodyPr>
+          <a:lstStyle/>
+          <a:p>
+            <a:pPr>
               <a:defRPr b="1" sz="1600">
                 <a:solidFill>
-                  <a:srgbClr val="8B5CF6"/>
-                </a:solidFill>
+                  <a:srgbClr val="332F2B"/>
+                </a:solidFill>
+                <a:latin typeface="Arial"/>
+              </a:defRPr>
+            </a:pPr>
+            <a:r>
+              <a:t>PodLearn AI — Podcast &amp; Quiz</a:t>
+            </a:r>
+          </a:p>
+        </p:txBody>
+      </p:sp>
+      <p:pic>
+        <p:nvPicPr>
+          <p:cNvPr id="6" name="Picture 5" descr="project2.jpg"/>
+          <p:cNvPicPr>
+            <a:picLocks noChangeAspect="1"/>
+          </p:cNvPicPr>
+          <p:nvPr/>
+        </p:nvPicPr>
+        <p:blipFill>
+          <a:blip r:embed="rId2"/>
+          <a:stretch>
+            <a:fillRect/>
+          </a:stretch>
+        </p:blipFill>
+        <p:spPr>
+          <a:xfrm>
+            <a:off x="2167589" y="2697480"/>
+            <a:ext cx="2248500" cy="1417320"/>
+          </a:xfrm>
+          <a:prstGeom prst="rect">
+            <a:avLst/>
+          </a:prstGeom>
+          <a:effectLst>
+            <a:outerShdw blurRad="73152" dist="27432" dir="5400000" rotWithShape="0">
+              <a:srgbClr val="4A4038">
+                <a:alpha val="20000"/>
+              </a:srgbClr>
+            </a:outerShdw>
+          </a:effectLst>
+        </p:spPr>
+      </p:pic>
+      <p:sp>
+        <p:nvSpPr>
+          <p:cNvPr id="7" name="TextBox 6"/>
+          <p:cNvSpPr txBox="1"/>
+          <p:nvPr/>
+        </p:nvSpPr>
+        <p:spPr>
+          <a:xfrm>
+            <a:off x="1051560" y="4251960"/>
+            <a:ext cx="4480560" cy="1645920"/>
+          </a:xfrm>
+          <a:prstGeom prst="rect">
+            <a:avLst/>
+          </a:prstGeom>
+          <a:noFill/>
+        </p:spPr>
+        <p:txBody>
+          <a:bodyPr wrap="square">
+            <a:spAutoFit/>
+          </a:bodyPr>
+          <a:lstStyle/>
+          <a:p>
+            <a:pPr>
+              <a:spcAft>
+                <a:spcPts val="400"/>
+              </a:spcAft>
+              <a:defRPr sz="1150">
+                <a:solidFill>
+                  <a:srgbClr val="332F2B"/>
+                </a:solidFill>
+                <a:latin typeface="Arial"/>
+              </a:defRPr>
+            </a:pPr>
+            <a:r>
+              <a:t>✓  Integrasi Gemini AI untuk naskah dialog.</a:t>
+            </a:r>
+          </a:p>
+          <a:p>
+            <a:pPr>
+              <a:spcAft>
+                <a:spcPts val="400"/>
+              </a:spcAft>
+              <a:defRPr sz="1150">
+                <a:solidFill>
+                  <a:srgbClr val="332F2B"/>
+                </a:solidFill>
+                <a:latin typeface="Arial"/>
+              </a:defRPr>
+            </a:pPr>
+            <a:r>
+              <a:t>✓  Microsoft Edge Neural TTS multi-suara.</a:t>
+            </a:r>
+          </a:p>
+          <a:p>
+            <a:pPr>
+              <a:spcAft>
+                <a:spcPts val="400"/>
+              </a:spcAft>
+              <a:defRPr sz="1150">
+                <a:solidFill>
+                  <a:srgbClr val="332F2B"/>
+                </a:solidFill>
+                <a:latin typeface="Arial"/>
+              </a:defRPr>
+            </a:pPr>
+            <a:r>
+              <a:t>✓  FFmpeg Concat untuk penggabungan audio.</a:t>
+            </a:r>
+          </a:p>
+          <a:p>
+            <a:pPr>
+              <a:spcAft>
+                <a:spcPts val="400"/>
+              </a:spcAft>
+              <a:defRPr sz="1150">
+                <a:solidFill>
+                  <a:srgbClr val="332F2B"/>
+                </a:solidFill>
+                <a:latin typeface="Arial"/>
+              </a:defRPr>
+            </a:pPr>
+            <a:r>
+              <a:t>✓  Generator 10 kuis evaluasi interaktif.</a:t>
+            </a:r>
+          </a:p>
+        </p:txBody>
+      </p:sp>
+      <p:sp>
+        <p:nvSpPr>
+          <p:cNvPr id="8" name="Rounded Rectangle 7"/>
+          <p:cNvSpPr/>
+          <p:nvPr/>
+        </p:nvSpPr>
+        <p:spPr>
+          <a:xfrm>
+            <a:off x="6309360" y="1737360"/>
+            <a:ext cx="5120640" cy="4297680"/>
+          </a:xfrm>
+          <a:prstGeom prst="roundRect">
+            <a:avLst>
+              <a:gd name="adj" fmla="val 6000"/>
+            </a:avLst>
+          </a:prstGeom>
+          <a:solidFill>
+            <a:srgbClr val="E3F1EF"/>
+          </a:solidFill>
+          <a:ln>
+            <a:noFill/>
+          </a:ln>
+          <a:effectLst>
+            <a:outerShdw blurRad="128016" dist="45720" dir="5400000" rotWithShape="0">
+              <a:srgbClr val="4A4038">
+                <a:alpha val="18000"/>
+              </a:srgbClr>
+            </a:outerShdw>
+          </a:effectLst>
+        </p:spPr>
+        <p:style>
+          <a:lnRef idx="1">
+            <a:schemeClr val="accent1"/>
+          </a:lnRef>
+          <a:fillRef idx="3">
+            <a:schemeClr val="accent1"/>
+          </a:fillRef>
+          <a:effectRef idx="2">
+            <a:schemeClr val="accent1"/>
+          </a:effectRef>
+          <a:fontRef idx="minor">
+            <a:schemeClr val="lt1"/>
+          </a:fontRef>
+        </p:style>
+        <p:txBody>
+          <a:bodyPr rtlCol="0" anchor="t" lIns="320040" rIns="320040" tIns="274320"/>
+          <a:lstStyle/>
+          <a:p>
+            <a:pPr algn="ctr"/>
+          </a:p>
+        </p:txBody>
+      </p:sp>
+      <p:sp>
+        <p:nvSpPr>
+          <p:cNvPr id="9" name="Oval 8"/>
+          <p:cNvSpPr/>
+          <p:nvPr/>
+        </p:nvSpPr>
+        <p:spPr>
+          <a:xfrm>
+            <a:off x="6583680" y="2011680"/>
+            <a:ext cx="548640" cy="548640"/>
+          </a:xfrm>
+          <a:prstGeom prst="ellipse">
+            <a:avLst/>
+          </a:prstGeom>
+          <a:solidFill>
+            <a:srgbClr val="3F8B8C"/>
+          </a:solidFill>
+          <a:ln>
+            <a:noFill/>
+          </a:ln>
+        </p:spPr>
+        <p:style>
+          <a:lnRef idx="1">
+            <a:schemeClr val="accent1"/>
+          </a:lnRef>
+          <a:fillRef idx="3">
+            <a:schemeClr val="accent1"/>
+          </a:fillRef>
+          <a:effectRef idx="2">
+            <a:schemeClr val="accent1"/>
+          </a:effectRef>
+          <a:fontRef idx="minor">
+            <a:schemeClr val="lt1"/>
+          </a:fontRef>
+        </p:style>
+        <p:txBody>
+          <a:bodyPr rtlCol="0" anchor="ctr" lIns="0" rIns="0" tIns="0" bIns="0"/>
+          <a:lstStyle/>
+          <a:p>
+            <a:pPr algn="ctr">
+              <a:defRPr sz="1800">
+                <a:solidFill>
+                  <a:srgbClr val="FFFFFF"/>
+                </a:solidFill>
+              </a:defRPr>
+            </a:pPr>
+            <a:r>
+              <a:t>✈</a:t>
+            </a:r>
+          </a:p>
+        </p:txBody>
+      </p:sp>
+      <p:sp>
+        <p:nvSpPr>
+          <p:cNvPr id="10" name="TextBox 9"/>
+          <p:cNvSpPr txBox="1"/>
+          <p:nvPr/>
+        </p:nvSpPr>
+        <p:spPr>
+          <a:xfrm>
+            <a:off x="7315200" y="1965960"/>
+            <a:ext cx="3931920" cy="548640"/>
+          </a:xfrm>
+          <a:prstGeom prst="rect">
+            <a:avLst/>
+          </a:prstGeom>
+          <a:noFill/>
+        </p:spPr>
+        <p:txBody>
+          <a:bodyPr wrap="square">
+            <a:spAutoFit/>
+          </a:bodyPr>
+          <a:lstStyle/>
+          <a:p>
+            <a:pPr>
+              <a:defRPr b="1" sz="1600">
+                <a:solidFill>
+                  <a:srgbClr val="332F2B"/>
+                </a:solidFill>
+                <a:latin typeface="Arial"/>
               </a:defRPr>
             </a:pPr>
             <a:r>
               <a:t>Telegram AI Assistant (Live 24/7)</a:t>
             </a:r>
           </a:p>
-          <a:p>
-            <a:pPr>
+        </p:txBody>
+      </p:sp>
+      <p:sp>
+        <p:nvSpPr>
+          <p:cNvPr id="11" name="TextBox 10"/>
+          <p:cNvSpPr txBox="1"/>
+          <p:nvPr/>
+        </p:nvSpPr>
+        <p:spPr>
+          <a:xfrm>
+            <a:off x="6629400" y="2697480"/>
+            <a:ext cx="4480560" cy="3017520"/>
+          </a:xfrm>
+          <a:prstGeom prst="rect">
+            <a:avLst/>
+          </a:prstGeom>
+          <a:noFill/>
+        </p:spPr>
+        <p:txBody>
+          <a:bodyPr wrap="square">
+            <a:spAutoFit/>
+          </a:bodyPr>
+          <a:lstStyle/>
+          <a:p>
+            <a:pPr>
+              <a:spcAft>
+                <a:spcPts val="800"/>
+              </a:spcAft>
               <a:defRPr sz="1200">
                 <a:solidFill>
-                  <a:srgbClr val="94A3B8"/>
-                </a:solidFill>
+                  <a:srgbClr val="8A847C"/>
+                </a:solidFill>
+                <a:latin typeface="Arial"/>
               </a:defRPr>
             </a:pPr>
             <a:r>
               <a:t>Bot Telegram personal cerdas yang aktif 24/7 di cloud server tanpa henti.</a:t>
             </a:r>
-            <a:br/>
-          </a:p>
-          <a:p>
-            <a:pPr>
-              <a:defRPr sz="1200">
-                <a:solidFill>
-                  <a:srgbClr val="F8FAFC"/>
-                </a:solidFill>
-              </a:defRPr>
-            </a:pPr>
-            <a:r>
-              <a:t>• Model LLM Llama-3.3 70B via Groq API.</a:t>
-            </a:r>
-          </a:p>
-          <a:p>
-            <a:pPr>
-              <a:defRPr sz="1200">
-                <a:solidFill>
-                  <a:srgbClr val="F8FAFC"/>
-                </a:solidFill>
-              </a:defRPr>
-            </a:pPr>
-            <a:r>
-              <a:t>• Respon cerdas multibahasa real-time.</a:t>
-            </a:r>
-          </a:p>
-          <a:p>
-            <a:pPr>
-              <a:defRPr sz="1200">
-                <a:solidFill>
-                  <a:srgbClr val="F8FAFC"/>
-                </a:solidFill>
-              </a:defRPr>
-            </a:pPr>
-            <a:r>
-              <a:t>• System prompt kustom untuk persona unik.</a:t>
-            </a:r>
-          </a:p>
-          <a:p>
-            <a:pPr>
-              <a:defRPr sz="1200">
-                <a:solidFill>
-                  <a:srgbClr val="F8FAFC"/>
-                </a:solidFill>
-              </a:defRPr>
-            </a:pPr>
-            <a:r>
-              <a:t>• Deployed 24/7 di Railway Cloud.</a:t>
+          </a:p>
+          <a:p>
+            <a:pPr>
+              <a:spcAft>
+                <a:spcPts val="600"/>
+              </a:spcAft>
+              <a:defRPr sz="1250">
+                <a:solidFill>
+                  <a:srgbClr val="332F2B"/>
+                </a:solidFill>
+                <a:latin typeface="Arial"/>
+              </a:defRPr>
+            </a:pPr>
+            <a:r>
+              <a:t>✓  Model LLM Llama-3.3 70B via Groq API.</a:t>
+            </a:r>
+          </a:p>
+          <a:p>
+            <a:pPr>
+              <a:spcAft>
+                <a:spcPts val="600"/>
+              </a:spcAft>
+              <a:defRPr sz="1250">
+                <a:solidFill>
+                  <a:srgbClr val="332F2B"/>
+                </a:solidFill>
+                <a:latin typeface="Arial"/>
+              </a:defRPr>
+            </a:pPr>
+            <a:r>
+              <a:t>✓  Respon cerdas multibahasa real-time.</a:t>
+            </a:r>
+          </a:p>
+          <a:p>
+            <a:pPr>
+              <a:spcAft>
+                <a:spcPts val="600"/>
+              </a:spcAft>
+              <a:defRPr sz="1250">
+                <a:solidFill>
+                  <a:srgbClr val="332F2B"/>
+                </a:solidFill>
+                <a:latin typeface="Arial"/>
+              </a:defRPr>
+            </a:pPr>
+            <a:r>
+              <a:t>✓  System prompt kustom untuk persona unik.</a:t>
+            </a:r>
+          </a:p>
+          <a:p>
+            <a:pPr>
+              <a:spcAft>
+                <a:spcPts val="600"/>
+              </a:spcAft>
+              <a:defRPr sz="1250">
+                <a:solidFill>
+                  <a:srgbClr val="332F2B"/>
+                </a:solidFill>
+                <a:latin typeface="Arial"/>
+              </a:defRPr>
+            </a:pPr>
+            <a:r>
+              <a:t>✓  Deployed 24/7 di Railway Cloud.</a:t>
             </a:r>
           </a:p>
         </p:txBody>
@@ -4502,7 +6083,7 @@
     <p:bg>
       <p:bgPr>
         <a:solidFill>
-          <a:srgbClr val="0F172A"/>
+          <a:srgbClr val="FBF8F3"/>
         </a:solidFill>
         <a:effectLst/>
       </p:bgPr>
@@ -4522,8 +6103,8 @@
         </p:nvSpPr>
         <p:spPr>
           <a:xfrm>
-            <a:off x="731520" y="457200"/>
-            <a:ext cx="10728655" cy="914400"/>
+            <a:off x="731520" y="502920"/>
+            <a:ext cx="10698480" cy="1051560"/>
           </a:xfrm>
           <a:prstGeom prst="rect">
             <a:avLst/>
@@ -4539,7 +6120,7 @@
             <a:pPr>
               <a:defRPr sz="1100" b="1">
                 <a:solidFill>
-                  <a:srgbClr val="06B6D4"/>
+                  <a:srgbClr val="C17A4A"/>
                 </a:solidFill>
                 <a:latin typeface="Arial"/>
               </a:defRPr>
@@ -4550,9 +6131,12 @@
           </a:p>
           <a:p>
             <a:pPr>
-              <a:defRPr sz="2600" b="1">
-                <a:solidFill>
-                  <a:srgbClr val="F8FAFC"/>
+              <a:spcBef>
+                <a:spcPts val="200"/>
+              </a:spcBef>
+              <a:defRPr sz="2700" b="1">
+                <a:solidFill>
+                  <a:srgbClr val="332F2B"/>
                 </a:solidFill>
                 <a:latin typeface="Arial"/>
               </a:defRPr>
@@ -4571,20 +6155,27 @@
         </p:nvSpPr>
         <p:spPr>
           <a:xfrm>
-            <a:off x="731520" y="1645920"/>
-            <a:ext cx="5120640" cy="4389120"/>
+            <a:off x="731520" y="1737360"/>
+            <a:ext cx="5120640" cy="4297680"/>
           </a:xfrm>
           <a:prstGeom prst="roundRect">
-            <a:avLst/>
+            <a:avLst>
+              <a:gd name="adj" fmla="val 6000"/>
+            </a:avLst>
           </a:prstGeom>
           <a:solidFill>
-            <a:srgbClr val="1E293B"/>
+            <a:srgbClr val="FBECDF"/>
           </a:solidFill>
           <a:ln>
-            <a:solidFill>
-              <a:srgbClr val="F97316"/>
-            </a:solidFill>
+            <a:noFill/>
           </a:ln>
+          <a:effectLst>
+            <a:outerShdw blurRad="128016" dist="45720" dir="5400000" rotWithShape="0">
+              <a:srgbClr val="4A4038">
+                <a:alpha val="18000"/>
+              </a:srgbClr>
+            </a:outerShdw>
+          </a:effectLst>
         </p:spPr>
         <p:style>
           <a:lnRef idx="1">
@@ -4601,91 +6192,32 @@
           </a:fontRef>
         </p:style>
         <p:txBody>
-          <a:bodyPr rtlCol="0" anchor="ctr" wrap="square" lIns="274320" tIns="274320"/>
-          <a:lstStyle/>
-          <a:p>
-            <a:pPr algn="ctr">
-              <a:defRPr b="1" sz="1600">
-                <a:solidFill>
-                  <a:srgbClr val="F97316"/>
-                </a:solidFill>
-              </a:defRPr>
-            </a:pPr>
-            <a:r>
-              <a:t>LDR Anchor (React Native App)</a:t>
-            </a:r>
-          </a:p>
-          <a:p>
-            <a:pPr>
-              <a:defRPr sz="1200">
-                <a:solidFill>
-                  <a:srgbClr val="F8FAFC"/>
-                </a:solidFill>
-              </a:defRPr>
-            </a:pPr>
-            <a:r>
-              <a:t>• Aplikasi mobile Android khusus pasangan jarak jauh (LDR).</a:t>
-            </a:r>
-          </a:p>
-          <a:p>
-            <a:pPr>
-              <a:defRPr sz="1200">
-                <a:solidFill>
-                  <a:srgbClr val="F8FAFC"/>
-                </a:solidFill>
-              </a:defRPr>
-            </a:pPr>
-            <a:r>
-              <a:t>• Fitur Mood sharing real-time &amp; pelukan virtual interaktif.</a:t>
-            </a:r>
-          </a:p>
-          <a:p>
-            <a:pPr>
-              <a:defRPr sz="1200">
-                <a:solidFill>
-                  <a:srgbClr val="F8FAFC"/>
-                </a:solidFill>
-              </a:defRPr>
-            </a:pPr>
-            <a:r>
-              <a:t>• Integrasi FCM V1 Push Notification via Expo.</a:t>
-            </a:r>
-          </a:p>
-          <a:p>
-            <a:pPr>
-              <a:defRPr sz="1200">
-                <a:solidFill>
-                  <a:srgbClr val="F8FAFC"/>
-                </a:solidFill>
-              </a:defRPr>
-            </a:pPr>
-            <a:r>
-              <a:t>• Firebase Firestore &amp; Auth backend integration.</a:t>
-            </a:r>
-          </a:p>
-        </p:txBody>
-      </p:sp>
-      <p:sp>
-        <p:nvSpPr>
-          <p:cNvPr id="4" name="Rounded Rectangle 3"/>
+          <a:bodyPr rtlCol="0" anchor="t" lIns="320040" rIns="320040" tIns="274320"/>
+          <a:lstStyle/>
+          <a:p>
+            <a:pPr algn="ctr"/>
+          </a:p>
+        </p:txBody>
+      </p:sp>
+      <p:sp>
+        <p:nvSpPr>
+          <p:cNvPr id="4" name="Oval 3"/>
           <p:cNvSpPr/>
           <p:nvPr/>
         </p:nvSpPr>
         <p:spPr>
           <a:xfrm>
-            <a:off x="6217920" y="1645920"/>
-            <a:ext cx="5212080" cy="4389120"/>
-          </a:xfrm>
-          <a:prstGeom prst="roundRect">
+            <a:off x="1005840" y="2011680"/>
+            <a:ext cx="548640" cy="548640"/>
+          </a:xfrm>
+          <a:prstGeom prst="ellipse">
             <a:avLst/>
           </a:prstGeom>
           <a:solidFill>
-            <a:srgbClr val="1E293B"/>
+            <a:srgbClr val="C17A4A"/>
           </a:solidFill>
           <a:ln>
-            <a:solidFill>
-              <a:srgbClr val="06B6D4"/>
-            </a:solidFill>
+            <a:noFill/>
           </a:ln>
         </p:spPr>
         <p:style>
@@ -4703,66 +6235,430 @@
           </a:fontRef>
         </p:style>
         <p:txBody>
-          <a:bodyPr rtlCol="0" anchor="ctr" wrap="square" lIns="274320" tIns="274320"/>
+          <a:bodyPr rtlCol="0" anchor="ctr" lIns="0" rIns="0" tIns="0" bIns="0"/>
           <a:lstStyle/>
           <a:p>
             <a:pPr algn="ctr">
+              <a:defRPr sz="1800">
+                <a:solidFill>
+                  <a:srgbClr val="FFFFFF"/>
+                </a:solidFill>
+              </a:defRPr>
+            </a:pPr>
+            <a:r>
+              <a:t>❤</a:t>
+            </a:r>
+          </a:p>
+        </p:txBody>
+      </p:sp>
+      <p:sp>
+        <p:nvSpPr>
+          <p:cNvPr id="5" name="TextBox 4"/>
+          <p:cNvSpPr txBox="1"/>
+          <p:nvPr/>
+        </p:nvSpPr>
+        <p:spPr>
+          <a:xfrm>
+            <a:off x="1737360" y="1965960"/>
+            <a:ext cx="3931920" cy="548640"/>
+          </a:xfrm>
+          <a:prstGeom prst="rect">
+            <a:avLst/>
+          </a:prstGeom>
+          <a:noFill/>
+        </p:spPr>
+        <p:txBody>
+          <a:bodyPr wrap="square">
+            <a:spAutoFit/>
+          </a:bodyPr>
+          <a:lstStyle/>
+          <a:p>
+            <a:pPr>
               <a:defRPr b="1" sz="1600">
                 <a:solidFill>
-                  <a:srgbClr val="06B6D4"/>
-                </a:solidFill>
+                  <a:srgbClr val="332F2B"/>
+                </a:solidFill>
+                <a:latin typeface="Arial"/>
+              </a:defRPr>
+            </a:pPr>
+            <a:r>
+              <a:t>LDR Anchor (React Native App)</a:t>
+            </a:r>
+          </a:p>
+        </p:txBody>
+      </p:sp>
+      <p:pic>
+        <p:nvPicPr>
+          <p:cNvPr id="6" name="Picture 5" descr="project6.jpg"/>
+          <p:cNvPicPr>
+            <a:picLocks noChangeAspect="1"/>
+          </p:cNvPicPr>
+          <p:nvPr/>
+        </p:nvPicPr>
+        <p:blipFill>
+          <a:blip r:embed="rId2"/>
+          <a:stretch>
+            <a:fillRect/>
+          </a:stretch>
+        </p:blipFill>
+        <p:spPr>
+          <a:xfrm>
+            <a:off x="4160520" y="3286732"/>
+            <a:ext cx="1417320" cy="1884734"/>
+          </a:xfrm>
+          <a:prstGeom prst="rect">
+            <a:avLst/>
+          </a:prstGeom>
+          <a:effectLst>
+            <a:outerShdw blurRad="73152" dist="27432" dir="5400000" rotWithShape="0">
+              <a:srgbClr val="4A4038">
+                <a:alpha val="20000"/>
+              </a:srgbClr>
+            </a:outerShdw>
+          </a:effectLst>
+        </p:spPr>
+      </p:pic>
+      <p:sp>
+        <p:nvSpPr>
+          <p:cNvPr id="7" name="TextBox 6"/>
+          <p:cNvSpPr txBox="1"/>
+          <p:nvPr/>
+        </p:nvSpPr>
+        <p:spPr>
+          <a:xfrm>
+            <a:off x="1051560" y="2697480"/>
+            <a:ext cx="2880360" cy="3108960"/>
+          </a:xfrm>
+          <a:prstGeom prst="rect">
+            <a:avLst/>
+          </a:prstGeom>
+          <a:noFill/>
+        </p:spPr>
+        <p:txBody>
+          <a:bodyPr wrap="square">
+            <a:spAutoFit/>
+          </a:bodyPr>
+          <a:lstStyle/>
+          <a:p>
+            <a:pPr>
+              <a:spcAft>
+                <a:spcPts val="800"/>
+              </a:spcAft>
+              <a:defRPr sz="1150">
+                <a:solidFill>
+                  <a:srgbClr val="332F2B"/>
+                </a:solidFill>
+                <a:latin typeface="Arial"/>
+              </a:defRPr>
+            </a:pPr>
+            <a:r>
+              <a:t>✓  Aplikasi mobile Android khusus pasangan jarak jauh (LDR).</a:t>
+            </a:r>
+          </a:p>
+          <a:p>
+            <a:pPr>
+              <a:spcAft>
+                <a:spcPts val="800"/>
+              </a:spcAft>
+              <a:defRPr sz="1150">
+                <a:solidFill>
+                  <a:srgbClr val="332F2B"/>
+                </a:solidFill>
+                <a:latin typeface="Arial"/>
+              </a:defRPr>
+            </a:pPr>
+            <a:r>
+              <a:t>✓  Fitur Mood sharing real-time &amp; pelukan virtual interaktif.</a:t>
+            </a:r>
+          </a:p>
+          <a:p>
+            <a:pPr>
+              <a:spcAft>
+                <a:spcPts val="800"/>
+              </a:spcAft>
+              <a:defRPr sz="1150">
+                <a:solidFill>
+                  <a:srgbClr val="332F2B"/>
+                </a:solidFill>
+                <a:latin typeface="Arial"/>
+              </a:defRPr>
+            </a:pPr>
+            <a:r>
+              <a:t>✓  Integrasi FCM V1 Push Notification via Expo.</a:t>
+            </a:r>
+          </a:p>
+          <a:p>
+            <a:pPr>
+              <a:spcAft>
+                <a:spcPts val="800"/>
+              </a:spcAft>
+              <a:defRPr sz="1150">
+                <a:solidFill>
+                  <a:srgbClr val="332F2B"/>
+                </a:solidFill>
+                <a:latin typeface="Arial"/>
+              </a:defRPr>
+            </a:pPr>
+            <a:r>
+              <a:t>✓  Firebase Firestore &amp; Auth backend integration.</a:t>
+            </a:r>
+          </a:p>
+        </p:txBody>
+      </p:sp>
+      <p:sp>
+        <p:nvSpPr>
+          <p:cNvPr id="8" name="Rounded Rectangle 7"/>
+          <p:cNvSpPr/>
+          <p:nvPr/>
+        </p:nvSpPr>
+        <p:spPr>
+          <a:xfrm>
+            <a:off x="6309360" y="1737360"/>
+            <a:ext cx="5120640" cy="4297680"/>
+          </a:xfrm>
+          <a:prstGeom prst="roundRect">
+            <a:avLst>
+              <a:gd name="adj" fmla="val 6000"/>
+            </a:avLst>
+          </a:prstGeom>
+          <a:solidFill>
+            <a:srgbClr val="E6F0E8"/>
+          </a:solidFill>
+          <a:ln>
+            <a:noFill/>
+          </a:ln>
+          <a:effectLst>
+            <a:outerShdw blurRad="128016" dist="45720" dir="5400000" rotWithShape="0">
+              <a:srgbClr val="4A4038">
+                <a:alpha val="18000"/>
+              </a:srgbClr>
+            </a:outerShdw>
+          </a:effectLst>
+        </p:spPr>
+        <p:style>
+          <a:lnRef idx="1">
+            <a:schemeClr val="accent1"/>
+          </a:lnRef>
+          <a:fillRef idx="3">
+            <a:schemeClr val="accent1"/>
+          </a:fillRef>
+          <a:effectRef idx="2">
+            <a:schemeClr val="accent1"/>
+          </a:effectRef>
+          <a:fontRef idx="minor">
+            <a:schemeClr val="lt1"/>
+          </a:fontRef>
+        </p:style>
+        <p:txBody>
+          <a:bodyPr rtlCol="0" anchor="t" lIns="320040" rIns="320040" tIns="274320"/>
+          <a:lstStyle/>
+          <a:p>
+            <a:pPr algn="ctr"/>
+          </a:p>
+        </p:txBody>
+      </p:sp>
+      <p:sp>
+        <p:nvSpPr>
+          <p:cNvPr id="9" name="Oval 8"/>
+          <p:cNvSpPr/>
+          <p:nvPr/>
+        </p:nvSpPr>
+        <p:spPr>
+          <a:xfrm>
+            <a:off x="6583680" y="2011680"/>
+            <a:ext cx="548640" cy="548640"/>
+          </a:xfrm>
+          <a:prstGeom prst="ellipse">
+            <a:avLst/>
+          </a:prstGeom>
+          <a:solidFill>
+            <a:srgbClr val="5B8A72"/>
+          </a:solidFill>
+          <a:ln>
+            <a:noFill/>
+          </a:ln>
+        </p:spPr>
+        <p:style>
+          <a:lnRef idx="1">
+            <a:schemeClr val="accent1"/>
+          </a:lnRef>
+          <a:fillRef idx="3">
+            <a:schemeClr val="accent1"/>
+          </a:fillRef>
+          <a:effectRef idx="2">
+            <a:schemeClr val="accent1"/>
+          </a:effectRef>
+          <a:fontRef idx="minor">
+            <a:schemeClr val="lt1"/>
+          </a:fontRef>
+        </p:style>
+        <p:txBody>
+          <a:bodyPr rtlCol="0" anchor="ctr" lIns="0" rIns="0" tIns="0" bIns="0"/>
+          <a:lstStyle/>
+          <a:p>
+            <a:pPr algn="ctr">
+              <a:defRPr sz="1800">
+                <a:solidFill>
+                  <a:srgbClr val="FFFFFF"/>
+                </a:solidFill>
+              </a:defRPr>
+            </a:pPr>
+            <a:r>
+              <a:t>⚕</a:t>
+            </a:r>
+          </a:p>
+        </p:txBody>
+      </p:sp>
+      <p:sp>
+        <p:nvSpPr>
+          <p:cNvPr id="10" name="TextBox 9"/>
+          <p:cNvSpPr txBox="1"/>
+          <p:nvPr/>
+        </p:nvSpPr>
+        <p:spPr>
+          <a:xfrm>
+            <a:off x="7315200" y="1965960"/>
+            <a:ext cx="3931920" cy="548640"/>
+          </a:xfrm>
+          <a:prstGeom prst="rect">
+            <a:avLst/>
+          </a:prstGeom>
+          <a:noFill/>
+        </p:spPr>
+        <p:txBody>
+          <a:bodyPr wrap="square">
+            <a:spAutoFit/>
+          </a:bodyPr>
+          <a:lstStyle/>
+          <a:p>
+            <a:pPr>
+              <a:defRPr b="1" sz="1600">
+                <a:solidFill>
+                  <a:srgbClr val="332F2B"/>
+                </a:solidFill>
+                <a:latin typeface="Arial"/>
               </a:defRPr>
             </a:pPr>
             <a:r>
               <a:t>Clinical Suite Dashboard</a:t>
             </a:r>
           </a:p>
-          <a:p>
-            <a:pPr>
-              <a:defRPr sz="1200">
-                <a:solidFill>
-                  <a:srgbClr val="F8FAFC"/>
-                </a:solidFill>
-              </a:defRPr>
-            </a:pPr>
-            <a:r>
-              <a:t>• Sistem rekapitulasi data medis &amp; manajemen klinis.</a:t>
-            </a:r>
-          </a:p>
-          <a:p>
-            <a:pPr>
-              <a:defRPr sz="1200">
-                <a:solidFill>
-                  <a:srgbClr val="F8FAFC"/>
-                </a:solidFill>
-              </a:defRPr>
-            </a:pPr>
-            <a:r>
-              <a:t>• Kalkulator parameter medis fungsional otomatis.</a:t>
-            </a:r>
-          </a:p>
-          <a:p>
-            <a:pPr>
-              <a:defRPr sz="1200">
-                <a:solidFill>
-                  <a:srgbClr val="F8FAFC"/>
-                </a:solidFill>
-              </a:defRPr>
-            </a:pPr>
-            <a:r>
-              <a:t>• Antarmuka bersih &amp; presisi tinggi berbasis Tailwind.</a:t>
-            </a:r>
-          </a:p>
-          <a:p>
-            <a:pPr>
-              <a:defRPr sz="1200">
-                <a:solidFill>
-                  <a:srgbClr val="F8FAFC"/>
-                </a:solidFill>
-              </a:defRPr>
-            </a:pPr>
-            <a:r>
-              <a:t>• Dirancang khusus untuk efisiensi operasional medis.</a:t>
+        </p:txBody>
+      </p:sp>
+      <p:pic>
+        <p:nvPicPr>
+          <p:cNvPr id="11" name="Picture 10" descr="project1.jpg"/>
+          <p:cNvPicPr>
+            <a:picLocks noChangeAspect="1"/>
+          </p:cNvPicPr>
+          <p:nvPr/>
+        </p:nvPicPr>
+        <p:blipFill>
+          <a:blip r:embed="rId3"/>
+          <a:stretch>
+            <a:fillRect/>
+          </a:stretch>
+        </p:blipFill>
+        <p:spPr>
+          <a:xfrm>
+            <a:off x="9738360" y="2806233"/>
+            <a:ext cx="1280160" cy="2845732"/>
+          </a:xfrm>
+          <a:prstGeom prst="rect">
+            <a:avLst/>
+          </a:prstGeom>
+          <a:effectLst>
+            <a:outerShdw blurRad="73152" dist="27432" dir="5400000" rotWithShape="0">
+              <a:srgbClr val="4A4038">
+                <a:alpha val="20000"/>
+              </a:srgbClr>
+            </a:outerShdw>
+          </a:effectLst>
+        </p:spPr>
+      </p:pic>
+      <p:sp>
+        <p:nvSpPr>
+          <p:cNvPr id="12" name="TextBox 11"/>
+          <p:cNvSpPr txBox="1"/>
+          <p:nvPr/>
+        </p:nvSpPr>
+        <p:spPr>
+          <a:xfrm>
+            <a:off x="6629400" y="2697480"/>
+            <a:ext cx="2880360" cy="3108960"/>
+          </a:xfrm>
+          <a:prstGeom prst="rect">
+            <a:avLst/>
+          </a:prstGeom>
+          <a:noFill/>
+        </p:spPr>
+        <p:txBody>
+          <a:bodyPr wrap="square">
+            <a:spAutoFit/>
+          </a:bodyPr>
+          <a:lstStyle/>
+          <a:p>
+            <a:pPr>
+              <a:spcAft>
+                <a:spcPts val="800"/>
+              </a:spcAft>
+              <a:defRPr sz="1150">
+                <a:solidFill>
+                  <a:srgbClr val="332F2B"/>
+                </a:solidFill>
+                <a:latin typeface="Arial"/>
+              </a:defRPr>
+            </a:pPr>
+            <a:r>
+              <a:t>✓  Sistem rekapitulasi data medis &amp; manajemen klinis.</a:t>
+            </a:r>
+          </a:p>
+          <a:p>
+            <a:pPr>
+              <a:spcAft>
+                <a:spcPts val="800"/>
+              </a:spcAft>
+              <a:defRPr sz="1150">
+                <a:solidFill>
+                  <a:srgbClr val="332F2B"/>
+                </a:solidFill>
+                <a:latin typeface="Arial"/>
+              </a:defRPr>
+            </a:pPr>
+            <a:r>
+              <a:t>✓  Kalkulator parameter medis fungsional otomatis.</a:t>
+            </a:r>
+          </a:p>
+          <a:p>
+            <a:pPr>
+              <a:spcAft>
+                <a:spcPts val="800"/>
+              </a:spcAft>
+              <a:defRPr sz="1150">
+                <a:solidFill>
+                  <a:srgbClr val="332F2B"/>
+                </a:solidFill>
+                <a:latin typeface="Arial"/>
+              </a:defRPr>
+            </a:pPr>
+            <a:r>
+              <a:t>✓  Antarmuka bersih &amp; presisi tinggi berbasis Tailwind.</a:t>
+            </a:r>
+          </a:p>
+          <a:p>
+            <a:pPr>
+              <a:spcAft>
+                <a:spcPts val="800"/>
+              </a:spcAft>
+              <a:defRPr sz="1150">
+                <a:solidFill>
+                  <a:srgbClr val="332F2B"/>
+                </a:solidFill>
+                <a:latin typeface="Arial"/>
+              </a:defRPr>
+            </a:pPr>
+            <a:r>
+              <a:t>✓  Dirancang khusus untuk efisiensi operasional medis.</a:t>
             </a:r>
           </a:p>
         </p:txBody>
@@ -4781,7 +6677,7 @@
     <p:bg>
       <p:bgPr>
         <a:solidFill>
-          <a:srgbClr val="0F172A"/>
+          <a:srgbClr val="FBF8F3"/>
         </a:solidFill>
         <a:effectLst/>
       </p:bgPr>
@@ -4801,8 +6697,8 @@
         </p:nvSpPr>
         <p:spPr>
           <a:xfrm>
-            <a:off x="731520" y="457200"/>
-            <a:ext cx="10728655" cy="914400"/>
+            <a:off x="731520" y="502920"/>
+            <a:ext cx="10698480" cy="1051560"/>
           </a:xfrm>
           <a:prstGeom prst="rect">
             <a:avLst/>
@@ -4818,7 +6714,7 @@
             <a:pPr>
               <a:defRPr sz="1100" b="1">
                 <a:solidFill>
-                  <a:srgbClr val="06B6D4"/>
+                  <a:srgbClr val="5B8A72"/>
                 </a:solidFill>
                 <a:latin typeface="Arial"/>
               </a:defRPr>
@@ -4829,9 +6725,12 @@
           </a:p>
           <a:p>
             <a:pPr>
-              <a:defRPr sz="2600" b="1">
-                <a:solidFill>
-                  <a:srgbClr val="F8FAFC"/>
+              <a:spcBef>
+                <a:spcPts val="200"/>
+              </a:spcBef>
+              <a:defRPr sz="2700" b="1">
+                <a:solidFill>
+                  <a:srgbClr val="332F2B"/>
                 </a:solidFill>
                 <a:latin typeface="Arial"/>
               </a:defRPr>
@@ -4850,20 +6749,27 @@
         </p:nvSpPr>
         <p:spPr>
           <a:xfrm>
-            <a:off x="731520" y="1645920"/>
-            <a:ext cx="5120640" cy="4389120"/>
+            <a:off x="731520" y="1737360"/>
+            <a:ext cx="5120640" cy="4297680"/>
           </a:xfrm>
           <a:prstGeom prst="roundRect">
-            <a:avLst/>
+            <a:avLst>
+              <a:gd name="adj" fmla="val 6000"/>
+            </a:avLst>
           </a:prstGeom>
           <a:solidFill>
-            <a:srgbClr val="1E293B"/>
+            <a:srgbClr val="E6F0E8"/>
           </a:solidFill>
           <a:ln>
-            <a:solidFill>
-              <a:srgbClr val="0284C7"/>
-            </a:solidFill>
+            <a:noFill/>
           </a:ln>
+          <a:effectLst>
+            <a:outerShdw blurRad="128016" dist="45720" dir="5400000" rotWithShape="0">
+              <a:srgbClr val="4A4038">
+                <a:alpha val="18000"/>
+              </a:srgbClr>
+            </a:outerShdw>
+          </a:effectLst>
         </p:spPr>
         <p:style>
           <a:lnRef idx="1">
@@ -4880,91 +6786,32 @@
           </a:fontRef>
         </p:style>
         <p:txBody>
-          <a:bodyPr rtlCol="0" anchor="ctr" wrap="square" lIns="274320" tIns="274320"/>
-          <a:lstStyle/>
-          <a:p>
-            <a:pPr algn="ctr">
-              <a:defRPr b="1" sz="1600">
-                <a:solidFill>
-                  <a:srgbClr val="0284C7"/>
-                </a:solidFill>
-              </a:defRPr>
-            </a:pPr>
-            <a:r>
-              <a:t>Cloud Inventory System (Serverless)</a:t>
-            </a:r>
-          </a:p>
-          <a:p>
-            <a:pPr>
-              <a:defRPr sz="1200">
-                <a:solidFill>
-                  <a:srgbClr val="F8FAFC"/>
-                </a:solidFill>
-              </a:defRPr>
-            </a:pPr>
-            <a:r>
-              <a:t>• Sistem inventaris berbasis Google Apps Script.</a:t>
-            </a:r>
-          </a:p>
-          <a:p>
-            <a:pPr>
-              <a:defRPr sz="1200">
-                <a:solidFill>
-                  <a:srgbClr val="F8FAFC"/>
-                </a:solidFill>
-              </a:defRPr>
-            </a:pPr>
-            <a:r>
-              <a:t>• Concurrency Protection via LockService.</a:t>
-            </a:r>
-          </a:p>
-          <a:p>
-            <a:pPr>
-              <a:defRPr sz="1200">
-                <a:solidFill>
-                  <a:srgbClr val="F8FAFC"/>
-                </a:solidFill>
-              </a:defRPr>
-            </a:pPr>
-            <a:r>
-              <a:t>• Role-Based Access Control (RBAC) &amp; Anti-XSS.</a:t>
-            </a:r>
-          </a:p>
-          <a:p>
-            <a:pPr>
-              <a:defRPr sz="1200">
-                <a:solidFill>
-                  <a:srgbClr val="F8FAFC"/>
-                </a:solidFill>
-              </a:defRPr>
-            </a:pPr>
-            <a:r>
-              <a:t>• Audit Trail log &amp; snapshot auto-backup ke Drive.</a:t>
-            </a:r>
-          </a:p>
-        </p:txBody>
-      </p:sp>
-      <p:sp>
-        <p:nvSpPr>
-          <p:cNvPr id="4" name="Rounded Rectangle 3"/>
+          <a:bodyPr rtlCol="0" anchor="t" lIns="320040" rIns="320040" tIns="274320"/>
+          <a:lstStyle/>
+          <a:p>
+            <a:pPr algn="ctr"/>
+          </a:p>
+        </p:txBody>
+      </p:sp>
+      <p:sp>
+        <p:nvSpPr>
+          <p:cNvPr id="4" name="Oval 3"/>
           <p:cNvSpPr/>
           <p:nvPr/>
         </p:nvSpPr>
         <p:spPr>
           <a:xfrm>
-            <a:off x="6217920" y="1645920"/>
-            <a:ext cx="5212080" cy="4389120"/>
-          </a:xfrm>
-          <a:prstGeom prst="roundRect">
+            <a:off x="1005840" y="2011680"/>
+            <a:ext cx="548640" cy="548640"/>
+          </a:xfrm>
+          <a:prstGeom prst="ellipse">
             <a:avLst/>
           </a:prstGeom>
           <a:solidFill>
-            <a:srgbClr val="1E293B"/>
+            <a:srgbClr val="5B8A72"/>
           </a:solidFill>
           <a:ln>
-            <a:solidFill>
-              <a:srgbClr val="10B981"/>
-            </a:solidFill>
+            <a:noFill/>
           </a:ln>
         </p:spPr>
         <p:style>
@@ -4982,66 +6829,399 @@
           </a:fontRef>
         </p:style>
         <p:txBody>
-          <a:bodyPr rtlCol="0" anchor="ctr" wrap="square" lIns="274320" tIns="274320"/>
+          <a:bodyPr rtlCol="0" anchor="ctr" lIns="0" rIns="0" tIns="0" bIns="0"/>
           <a:lstStyle/>
           <a:p>
             <a:pPr algn="ctr">
+              <a:defRPr sz="1800">
+                <a:solidFill>
+                  <a:srgbClr val="FFFFFF"/>
+                </a:solidFill>
+              </a:defRPr>
+            </a:pPr>
+            <a:r>
+              <a:t>☁</a:t>
+            </a:r>
+          </a:p>
+        </p:txBody>
+      </p:sp>
+      <p:sp>
+        <p:nvSpPr>
+          <p:cNvPr id="5" name="TextBox 4"/>
+          <p:cNvSpPr txBox="1"/>
+          <p:nvPr/>
+        </p:nvSpPr>
+        <p:spPr>
+          <a:xfrm>
+            <a:off x="1737360" y="1965960"/>
+            <a:ext cx="3931920" cy="548640"/>
+          </a:xfrm>
+          <a:prstGeom prst="rect">
+            <a:avLst/>
+          </a:prstGeom>
+          <a:noFill/>
+        </p:spPr>
+        <p:txBody>
+          <a:bodyPr wrap="square">
+            <a:spAutoFit/>
+          </a:bodyPr>
+          <a:lstStyle/>
+          <a:p>
+            <a:pPr>
               <a:defRPr b="1" sz="1600">
                 <a:solidFill>
-                  <a:srgbClr val="10B981"/>
-                </a:solidFill>
+                  <a:srgbClr val="332F2B"/>
+                </a:solidFill>
+                <a:latin typeface="Arial"/>
+              </a:defRPr>
+            </a:pPr>
+            <a:r>
+              <a:t>Cloud Inventory System (Serverless)</a:t>
+            </a:r>
+          </a:p>
+        </p:txBody>
+      </p:sp>
+      <p:pic>
+        <p:nvPicPr>
+          <p:cNvPr id="6" name="Picture 5" descr="project3.jpg"/>
+          <p:cNvPicPr>
+            <a:picLocks noChangeAspect="1"/>
+          </p:cNvPicPr>
+          <p:nvPr/>
+        </p:nvPicPr>
+        <p:blipFill>
+          <a:blip r:embed="rId2"/>
+          <a:stretch>
+            <a:fillRect/>
+          </a:stretch>
+        </p:blipFill>
+        <p:spPr>
+          <a:xfrm>
+            <a:off x="1931212" y="2697480"/>
+            <a:ext cx="2721254" cy="1417320"/>
+          </a:xfrm>
+          <a:prstGeom prst="rect">
+            <a:avLst/>
+          </a:prstGeom>
+          <a:effectLst>
+            <a:outerShdw blurRad="73152" dist="27432" dir="5400000" rotWithShape="0">
+              <a:srgbClr val="4A4038">
+                <a:alpha val="20000"/>
+              </a:srgbClr>
+            </a:outerShdw>
+          </a:effectLst>
+        </p:spPr>
+      </p:pic>
+      <p:sp>
+        <p:nvSpPr>
+          <p:cNvPr id="7" name="TextBox 6"/>
+          <p:cNvSpPr txBox="1"/>
+          <p:nvPr/>
+        </p:nvSpPr>
+        <p:spPr>
+          <a:xfrm>
+            <a:off x="1051560" y="4251960"/>
+            <a:ext cx="4480560" cy="1645920"/>
+          </a:xfrm>
+          <a:prstGeom prst="rect">
+            <a:avLst/>
+          </a:prstGeom>
+          <a:noFill/>
+        </p:spPr>
+        <p:txBody>
+          <a:bodyPr wrap="square">
+            <a:spAutoFit/>
+          </a:bodyPr>
+          <a:lstStyle/>
+          <a:p>
+            <a:pPr>
+              <a:spcAft>
+                <a:spcPts val="400"/>
+              </a:spcAft>
+              <a:defRPr sz="1150">
+                <a:solidFill>
+                  <a:srgbClr val="332F2B"/>
+                </a:solidFill>
+                <a:latin typeface="Arial"/>
+              </a:defRPr>
+            </a:pPr>
+            <a:r>
+              <a:t>✓  Sistem inventaris berbasis Google Apps Script.</a:t>
+            </a:r>
+          </a:p>
+          <a:p>
+            <a:pPr>
+              <a:spcAft>
+                <a:spcPts val="400"/>
+              </a:spcAft>
+              <a:defRPr sz="1150">
+                <a:solidFill>
+                  <a:srgbClr val="332F2B"/>
+                </a:solidFill>
+                <a:latin typeface="Arial"/>
+              </a:defRPr>
+            </a:pPr>
+            <a:r>
+              <a:t>✓  Concurrency Protection via LockService.</a:t>
+            </a:r>
+          </a:p>
+          <a:p>
+            <a:pPr>
+              <a:spcAft>
+                <a:spcPts val="400"/>
+              </a:spcAft>
+              <a:defRPr sz="1150">
+                <a:solidFill>
+                  <a:srgbClr val="332F2B"/>
+                </a:solidFill>
+                <a:latin typeface="Arial"/>
+              </a:defRPr>
+            </a:pPr>
+            <a:r>
+              <a:t>✓  Role-Based Access Control (RBAC) &amp; Anti-XSS.</a:t>
+            </a:r>
+          </a:p>
+          <a:p>
+            <a:pPr>
+              <a:spcAft>
+                <a:spcPts val="400"/>
+              </a:spcAft>
+              <a:defRPr sz="1150">
+                <a:solidFill>
+                  <a:srgbClr val="332F2B"/>
+                </a:solidFill>
+                <a:latin typeface="Arial"/>
+              </a:defRPr>
+            </a:pPr>
+            <a:r>
+              <a:t>✓  Audit Trail log &amp; snapshot auto-backup ke Drive.</a:t>
+            </a:r>
+          </a:p>
+        </p:txBody>
+      </p:sp>
+      <p:sp>
+        <p:nvSpPr>
+          <p:cNvPr id="8" name="Rounded Rectangle 7"/>
+          <p:cNvSpPr/>
+          <p:nvPr/>
+        </p:nvSpPr>
+        <p:spPr>
+          <a:xfrm>
+            <a:off x="6309360" y="1737360"/>
+            <a:ext cx="5120640" cy="4297680"/>
+          </a:xfrm>
+          <a:prstGeom prst="roundRect">
+            <a:avLst>
+              <a:gd name="adj" fmla="val 6000"/>
+            </a:avLst>
+          </a:prstGeom>
+          <a:solidFill>
+            <a:srgbClr val="FBECDF"/>
+          </a:solidFill>
+          <a:ln>
+            <a:noFill/>
+          </a:ln>
+          <a:effectLst>
+            <a:outerShdw blurRad="128016" dist="45720" dir="5400000" rotWithShape="0">
+              <a:srgbClr val="4A4038">
+                <a:alpha val="18000"/>
+              </a:srgbClr>
+            </a:outerShdw>
+          </a:effectLst>
+        </p:spPr>
+        <p:style>
+          <a:lnRef idx="1">
+            <a:schemeClr val="accent1"/>
+          </a:lnRef>
+          <a:fillRef idx="3">
+            <a:schemeClr val="accent1"/>
+          </a:fillRef>
+          <a:effectRef idx="2">
+            <a:schemeClr val="accent1"/>
+          </a:effectRef>
+          <a:fontRef idx="minor">
+            <a:schemeClr val="lt1"/>
+          </a:fontRef>
+        </p:style>
+        <p:txBody>
+          <a:bodyPr rtlCol="0" anchor="t" lIns="320040" rIns="320040" tIns="274320"/>
+          <a:lstStyle/>
+          <a:p>
+            <a:pPr algn="ctr"/>
+          </a:p>
+        </p:txBody>
+      </p:sp>
+      <p:sp>
+        <p:nvSpPr>
+          <p:cNvPr id="9" name="Oval 8"/>
+          <p:cNvSpPr/>
+          <p:nvPr/>
+        </p:nvSpPr>
+        <p:spPr>
+          <a:xfrm>
+            <a:off x="6583680" y="2011680"/>
+            <a:ext cx="548640" cy="548640"/>
+          </a:xfrm>
+          <a:prstGeom prst="ellipse">
+            <a:avLst/>
+          </a:prstGeom>
+          <a:solidFill>
+            <a:srgbClr val="C17A4A"/>
+          </a:solidFill>
+          <a:ln>
+            <a:noFill/>
+          </a:ln>
+        </p:spPr>
+        <p:style>
+          <a:lnRef idx="1">
+            <a:schemeClr val="accent1"/>
+          </a:lnRef>
+          <a:fillRef idx="3">
+            <a:schemeClr val="accent1"/>
+          </a:fillRef>
+          <a:effectRef idx="2">
+            <a:schemeClr val="accent1"/>
+          </a:effectRef>
+          <a:fontRef idx="minor">
+            <a:schemeClr val="lt1"/>
+          </a:fontRef>
+        </p:style>
+        <p:txBody>
+          <a:bodyPr rtlCol="0" anchor="ctr" lIns="0" rIns="0" tIns="0" bIns="0"/>
+          <a:lstStyle/>
+          <a:p>
+            <a:pPr algn="ctr">
+              <a:defRPr sz="1800">
+                <a:solidFill>
+                  <a:srgbClr val="FFFFFF"/>
+                </a:solidFill>
+              </a:defRPr>
+            </a:pPr>
+            <a:r>
+              <a:t>⌘</a:t>
+            </a:r>
+          </a:p>
+        </p:txBody>
+      </p:sp>
+      <p:sp>
+        <p:nvSpPr>
+          <p:cNvPr id="10" name="TextBox 9"/>
+          <p:cNvSpPr txBox="1"/>
+          <p:nvPr/>
+        </p:nvSpPr>
+        <p:spPr>
+          <a:xfrm>
+            <a:off x="7315200" y="1965960"/>
+            <a:ext cx="3931920" cy="548640"/>
+          </a:xfrm>
+          <a:prstGeom prst="rect">
+            <a:avLst/>
+          </a:prstGeom>
+          <a:noFill/>
+        </p:spPr>
+        <p:txBody>
+          <a:bodyPr wrap="square">
+            <a:spAutoFit/>
+          </a:bodyPr>
+          <a:lstStyle/>
+          <a:p>
+            <a:pPr>
+              <a:defRPr b="1" sz="1600">
+                <a:solidFill>
+                  <a:srgbClr val="332F2B"/>
+                </a:solidFill>
+                <a:latin typeface="Arial"/>
               </a:defRPr>
             </a:pPr>
             <a:r>
               <a:t>Domain Explorer (Laravel 11)</a:t>
             </a:r>
           </a:p>
-          <a:p>
-            <a:pPr>
-              <a:defRPr sz="1200">
-                <a:solidFill>
-                  <a:srgbClr val="F8FAFC"/>
-                </a:solidFill>
-              </a:defRPr>
-            </a:pPr>
-            <a:r>
-              <a:t>• Aplikasi manajemen domain berbasis Laravel 11.</a:t>
-            </a:r>
-          </a:p>
-          <a:p>
-            <a:pPr>
-              <a:defRPr sz="1200">
-                <a:solidFill>
-                  <a:srgbClr val="F8FAFC"/>
-                </a:solidFill>
-              </a:defRPr>
-            </a:pPr>
-            <a:r>
-              <a:t>• Arsitektur MVC bersih dengan Blade views.</a:t>
-            </a:r>
-          </a:p>
-          <a:p>
-            <a:pPr>
-              <a:defRPr sz="1200">
-                <a:solidFill>
-                  <a:srgbClr val="F8FAFC"/>
-                </a:solidFill>
-              </a:defRPr>
-            </a:pPr>
-            <a:r>
-              <a:t>• Penggunaan SQLite database untuk performa ringan.</a:t>
-            </a:r>
-          </a:p>
-          <a:p>
-            <a:pPr>
-              <a:defRPr sz="1200">
-                <a:solidFill>
-                  <a:srgbClr val="F8FAFC"/>
-                </a:solidFill>
-              </a:defRPr>
-            </a:pPr>
-            <a:r>
-              <a:t>• Database Migrations &amp; Seeders otomatis.</a:t>
+        </p:txBody>
+      </p:sp>
+      <p:sp>
+        <p:nvSpPr>
+          <p:cNvPr id="11" name="TextBox 10"/>
+          <p:cNvSpPr txBox="1"/>
+          <p:nvPr/>
+        </p:nvSpPr>
+        <p:spPr>
+          <a:xfrm>
+            <a:off x="6629400" y="2697480"/>
+            <a:ext cx="4480560" cy="3017520"/>
+          </a:xfrm>
+          <a:prstGeom prst="rect">
+            <a:avLst/>
+          </a:prstGeom>
+          <a:noFill/>
+        </p:spPr>
+        <p:txBody>
+          <a:bodyPr wrap="square">
+            <a:spAutoFit/>
+          </a:bodyPr>
+          <a:lstStyle/>
+          <a:p>
+            <a:pPr>
+              <a:spcAft>
+                <a:spcPts val="800"/>
+              </a:spcAft>
+              <a:defRPr sz="1250">
+                <a:solidFill>
+                  <a:srgbClr val="332F2B"/>
+                </a:solidFill>
+                <a:latin typeface="Arial"/>
+              </a:defRPr>
+            </a:pPr>
+            <a:r>
+              <a:t>✓  Aplikasi manajemen domain berbasis Laravel 11.</a:t>
+            </a:r>
+          </a:p>
+          <a:p>
+            <a:pPr>
+              <a:spcAft>
+                <a:spcPts val="800"/>
+              </a:spcAft>
+              <a:defRPr sz="1250">
+                <a:solidFill>
+                  <a:srgbClr val="332F2B"/>
+                </a:solidFill>
+                <a:latin typeface="Arial"/>
+              </a:defRPr>
+            </a:pPr>
+            <a:r>
+              <a:t>✓  Arsitektur MVC bersih dengan Blade views.</a:t>
+            </a:r>
+          </a:p>
+          <a:p>
+            <a:pPr>
+              <a:spcAft>
+                <a:spcPts val="800"/>
+              </a:spcAft>
+              <a:defRPr sz="1250">
+                <a:solidFill>
+                  <a:srgbClr val="332F2B"/>
+                </a:solidFill>
+                <a:latin typeface="Arial"/>
+              </a:defRPr>
+            </a:pPr>
+            <a:r>
+              <a:t>✓  Penggunaan SQLite database untuk performa ringan.</a:t>
+            </a:r>
+          </a:p>
+          <a:p>
+            <a:pPr>
+              <a:spcAft>
+                <a:spcPts val="800"/>
+              </a:spcAft>
+              <a:defRPr sz="1250">
+                <a:solidFill>
+                  <a:srgbClr val="332F2B"/>
+                </a:solidFill>
+                <a:latin typeface="Arial"/>
+              </a:defRPr>
+            </a:pPr>
+            <a:r>
+              <a:t>✓  Database Migrations &amp; Seeders otomatis.</a:t>
             </a:r>
           </a:p>
         </p:txBody>
@@ -5060,7 +7240,7 @@
     <p:bg>
       <p:bgPr>
         <a:solidFill>
-          <a:srgbClr val="0F172A"/>
+          <a:srgbClr val="FBF8F3"/>
         </a:solidFill>
         <a:effectLst/>
       </p:bgPr>
@@ -5074,26 +7254,85 @@
       <p:grpSpPr/>
       <p:sp>
         <p:nvSpPr>
-          <p:cNvPr id="2" name="Rounded Rectangle 1"/>
+          <p:cNvPr id="2" name="TextBox 1"/>
+          <p:cNvSpPr txBox="1"/>
+          <p:nvPr/>
+        </p:nvSpPr>
+        <p:spPr>
+          <a:xfrm>
+            <a:off x="731520" y="502920"/>
+            <a:ext cx="10698480" cy="1051560"/>
+          </a:xfrm>
+          <a:prstGeom prst="rect">
+            <a:avLst/>
+          </a:prstGeom>
+          <a:noFill/>
+        </p:spPr>
+        <p:txBody>
+          <a:bodyPr wrap="square">
+            <a:spAutoFit/>
+          </a:bodyPr>
+          <a:lstStyle/>
+          <a:p>
+            <a:pPr>
+              <a:defRPr sz="1100" b="1">
+                <a:solidFill>
+                  <a:srgbClr val="C4748C"/>
+                </a:solidFill>
+                <a:latin typeface="Arial"/>
+              </a:defRPr>
+            </a:pPr>
+            <a:r>
+              <a:t>UNDANGAN DIGITAL</a:t>
+            </a:r>
+          </a:p>
+          <a:p>
+            <a:pPr>
+              <a:spcBef>
+                <a:spcPts val="200"/>
+              </a:spcBef>
+              <a:defRPr sz="2700" b="1">
+                <a:solidFill>
+                  <a:srgbClr val="332F2B"/>
+                </a:solidFill>
+                <a:latin typeface="Arial"/>
+              </a:defRPr>
+            </a:pPr>
+            <a:r>
+              <a:t>LUME — Wedding Invitation</a:t>
+            </a:r>
+          </a:p>
+        </p:txBody>
+      </p:sp>
+      <p:sp>
+        <p:nvSpPr>
+          <p:cNvPr id="3" name="Rounded Rectangle 2"/>
           <p:cNvSpPr/>
           <p:nvPr/>
         </p:nvSpPr>
         <p:spPr>
           <a:xfrm>
-            <a:off x="1371600" y="1371600"/>
-            <a:ext cx="9448495" cy="4114800"/>
+            <a:off x="731520" y="1737360"/>
+            <a:ext cx="7711135" cy="4297680"/>
           </a:xfrm>
           <a:prstGeom prst="roundRect">
-            <a:avLst/>
+            <a:avLst>
+              <a:gd name="adj" fmla="val 6000"/>
+            </a:avLst>
           </a:prstGeom>
           <a:solidFill>
-            <a:srgbClr val="1E293B"/>
+            <a:srgbClr val="FBE9ED"/>
           </a:solidFill>
           <a:ln>
-            <a:solidFill>
-              <a:srgbClr val="06B6D4"/>
-            </a:solidFill>
+            <a:noFill/>
           </a:ln>
+          <a:effectLst>
+            <a:outerShdw blurRad="128016" dist="45720" dir="5400000" rotWithShape="0">
+              <a:srgbClr val="4A4038">
+                <a:alpha val="18000"/>
+              </a:srgbClr>
+            </a:outerShdw>
+          </a:effectLst>
         </p:spPr>
         <p:style>
           <a:lnRef idx="1">
@@ -5110,83 +7349,280 @@
           </a:fontRef>
         </p:style>
         <p:txBody>
-          <a:bodyPr rtlCol="0" anchor="ctr" wrap="square" lIns="457200" tIns="457200"/>
+          <a:bodyPr rtlCol="0" anchor="t" lIns="320040" rIns="320040" tIns="274320"/>
+          <a:lstStyle/>
+          <a:p>
+            <a:pPr algn="ctr"/>
+          </a:p>
+        </p:txBody>
+      </p:sp>
+      <p:sp>
+        <p:nvSpPr>
+          <p:cNvPr id="4" name="Oval 3"/>
+          <p:cNvSpPr/>
+          <p:nvPr/>
+        </p:nvSpPr>
+        <p:spPr>
+          <a:xfrm>
+            <a:off x="1005840" y="1965960"/>
+            <a:ext cx="502920" cy="502920"/>
+          </a:xfrm>
+          <a:prstGeom prst="ellipse">
+            <a:avLst/>
+          </a:prstGeom>
+          <a:solidFill>
+            <a:srgbClr val="C4748C"/>
+          </a:solidFill>
+          <a:ln>
+            <a:noFill/>
+          </a:ln>
+        </p:spPr>
+        <p:style>
+          <a:lnRef idx="1">
+            <a:schemeClr val="accent1"/>
+          </a:lnRef>
+          <a:fillRef idx="3">
+            <a:schemeClr val="accent1"/>
+          </a:fillRef>
+          <a:effectRef idx="2">
+            <a:schemeClr val="accent1"/>
+          </a:effectRef>
+          <a:fontRef idx="minor">
+            <a:schemeClr val="lt1"/>
+          </a:fontRef>
+        </p:style>
+        <p:txBody>
+          <a:bodyPr rtlCol="0" anchor="ctr" lIns="0" rIns="0" tIns="0" bIns="0"/>
           <a:lstStyle/>
           <a:p>
             <a:pPr algn="ctr">
-              <a:defRPr b="1" sz="2800">
-                <a:solidFill>
-                  <a:srgbClr val="06B6D4"/>
-                </a:solidFill>
-              </a:defRPr>
-            </a:pPr>
-            <a:r>
-              <a:t>Mari Berkolaborasi!</a:t>
-            </a:r>
-          </a:p>
-          <a:p>
-            <a:pPr>
-              <a:defRPr sz="1400">
-                <a:solidFill>
-                  <a:srgbClr val="F8FAFC"/>
-                </a:solidFill>
-              </a:defRPr>
-            </a:pPr>
-            <a:r>
-              <a:t>Terbuka untuk proyek freelance, pengembangan sistem kustom, maupun posisi software engineer.</a:t>
-            </a:r>
-            <a:br/>
-          </a:p>
-          <a:p>
-            <a:pPr>
-              <a:defRPr sz="1500">
-                <a:solidFill>
-                  <a:srgbClr val="94A3B8"/>
-                </a:solidFill>
-              </a:defRPr>
-            </a:pPr>
-            <a:r>
-              <a:t>📱 WhatsApp : +62 895-4147-81707</a:t>
-            </a:r>
-          </a:p>
-          <a:p>
-            <a:pPr>
-              <a:defRPr sz="1500">
-                <a:solidFill>
-                  <a:srgbClr val="94A3B8"/>
-                </a:solidFill>
-              </a:defRPr>
-            </a:pPr>
-            <a:r>
-              <a:t>✉️ Email    : ulula2812@gmail.com</a:t>
-            </a:r>
-          </a:p>
-          <a:p>
-            <a:pPr>
-              <a:defRPr sz="1500">
-                <a:solidFill>
-                  <a:srgbClr val="94A3B8"/>
-                </a:solidFill>
-              </a:defRPr>
-            </a:pPr>
-            <a:r>
-              <a:t>🌐 Portofolio: https://ulul-portofolio-3odd.vercel.app/</a:t>
-            </a:r>
-          </a:p>
-          <a:p>
-            <a:pPr>
-              <a:defRPr sz="1500">
-                <a:solidFill>
-                  <a:srgbClr val="94A3B8"/>
-                </a:solidFill>
-              </a:defRPr>
-            </a:pPr>
-            <a:r>
-              <a:t>📍 Lokasi   : Bogor, Jawa Barat, Indonesia</a:t>
-            </a:r>
-          </a:p>
-        </p:txBody>
-      </p:sp>
+              <a:defRPr sz="1800">
+                <a:solidFill>
+                  <a:srgbClr val="FFFFFF"/>
+                </a:solidFill>
+              </a:defRPr>
+            </a:pPr>
+            <a:r>
+              <a:t>♡</a:t>
+            </a:r>
+          </a:p>
+        </p:txBody>
+      </p:sp>
+      <p:sp>
+        <p:nvSpPr>
+          <p:cNvPr id="5" name="TextBox 4"/>
+          <p:cNvSpPr txBox="1"/>
+          <p:nvPr/>
+        </p:nvSpPr>
+        <p:spPr>
+          <a:xfrm>
+            <a:off x="1691640" y="1938528"/>
+            <a:ext cx="6705295" cy="548640"/>
+          </a:xfrm>
+          <a:prstGeom prst="rect">
+            <a:avLst/>
+          </a:prstGeom>
+          <a:noFill/>
+        </p:spPr>
+        <p:txBody>
+          <a:bodyPr wrap="square">
+            <a:spAutoFit/>
+          </a:bodyPr>
+          <a:lstStyle/>
+          <a:p>
+            <a:pPr>
+              <a:defRPr b="1" sz="1600">
+                <a:solidFill>
+                  <a:srgbClr val="332F2B"/>
+                </a:solidFill>
+                <a:latin typeface="Arial"/>
+              </a:defRPr>
+            </a:pPr>
+            <a:r>
+              <a:t>Jasa Pembuatan Undangan Digital Pernikahan</a:t>
+            </a:r>
+          </a:p>
+        </p:txBody>
+      </p:sp>
+      <p:sp>
+        <p:nvSpPr>
+          <p:cNvPr id="6" name="TextBox 5"/>
+          <p:cNvSpPr txBox="1"/>
+          <p:nvPr/>
+        </p:nvSpPr>
+        <p:spPr>
+          <a:xfrm>
+            <a:off x="1051560" y="2697480"/>
+            <a:ext cx="7162495" cy="3200400"/>
+          </a:xfrm>
+          <a:prstGeom prst="rect">
+            <a:avLst/>
+          </a:prstGeom>
+          <a:noFill/>
+        </p:spPr>
+        <p:txBody>
+          <a:bodyPr wrap="square">
+            <a:spAutoFit/>
+          </a:bodyPr>
+          <a:lstStyle/>
+          <a:p>
+            <a:pPr>
+              <a:spcAft>
+                <a:spcPts val="800"/>
+              </a:spcAft>
+              <a:defRPr sz="1200">
+                <a:solidFill>
+                  <a:srgbClr val="8A847C"/>
+                </a:solidFill>
+                <a:latin typeface="Arial"/>
+              </a:defRPr>
+            </a:pPr>
+            <a:r>
+              <a:t>Layanan custom undangan pernikahan digital yang bisa dibagikan lewat link pribadi.</a:t>
+            </a:r>
+          </a:p>
+          <a:p>
+            <a:pPr>
+              <a:spcAft>
+                <a:spcPts val="800"/>
+              </a:spcAft>
+              <a:defRPr sz="1250">
+                <a:solidFill>
+                  <a:srgbClr val="332F2B"/>
+                </a:solidFill>
+                <a:latin typeface="Arial"/>
+              </a:defRPr>
+            </a:pPr>
+            <a:r>
+              <a:t>✓  Countdown Pernikahan Real-Time: hitung mundur hari, jam, menit, &amp; detik menuju hari-H.</a:t>
+            </a:r>
+          </a:p>
+          <a:p>
+            <a:pPr>
+              <a:spcAft>
+                <a:spcPts val="800"/>
+              </a:spcAft>
+              <a:defRPr sz="1250">
+                <a:solidFill>
+                  <a:srgbClr val="332F2B"/>
+                </a:solidFill>
+                <a:latin typeface="Arial"/>
+              </a:defRPr>
+            </a:pPr>
+            <a:r>
+              <a:t>✓  Desain Hero Elegan: foto pasangan dengan overlay gelap &amp; tipografi serif premium.</a:t>
+            </a:r>
+          </a:p>
+          <a:p>
+            <a:pPr>
+              <a:spcAft>
+                <a:spcPts val="800"/>
+              </a:spcAft>
+              <a:defRPr sz="1250">
+                <a:solidFill>
+                  <a:srgbClr val="332F2B"/>
+                </a:solidFill>
+                <a:latin typeface="Arial"/>
+              </a:defRPr>
+            </a:pPr>
+            <a:r>
+              <a:t>✓  Custom Nama &amp; Tanggal: setiap undangan dipersonalisasi sesuai identitas pasangan.</a:t>
+            </a:r>
+          </a:p>
+          <a:p>
+            <a:pPr>
+              <a:spcAft>
+                <a:spcPts val="800"/>
+              </a:spcAft>
+              <a:defRPr sz="1250">
+                <a:solidFill>
+                  <a:srgbClr val="332F2B"/>
+                </a:solidFill>
+                <a:latin typeface="Arial"/>
+              </a:defRPr>
+            </a:pPr>
+            <a:r>
+              <a:t>✓  Dibagikan via Link Pribadi: mudah disebar lewat WhatsApp maupun media sosial.</a:t>
+            </a:r>
+          </a:p>
+        </p:txBody>
+      </p:sp>
+      <p:sp>
+        <p:nvSpPr>
+          <p:cNvPr id="7" name="Rounded Rectangle 6"/>
+          <p:cNvSpPr/>
+          <p:nvPr/>
+        </p:nvSpPr>
+        <p:spPr>
+          <a:xfrm>
+            <a:off x="8716975" y="1995664"/>
+            <a:ext cx="2743200" cy="3781071"/>
+          </a:xfrm>
+          <a:prstGeom prst="roundRect">
+            <a:avLst>
+              <a:gd name="adj" fmla="val 4000"/>
+            </a:avLst>
+          </a:prstGeom>
+          <a:solidFill>
+            <a:srgbClr val="FFFFFF"/>
+          </a:solidFill>
+          <a:ln>
+            <a:noFill/>
+          </a:ln>
+          <a:effectLst>
+            <a:outerShdw blurRad="109728" dist="36576" dir="5400000" rotWithShape="0">
+              <a:srgbClr val="4A4038">
+                <a:alpha val="22000"/>
+              </a:srgbClr>
+            </a:outerShdw>
+          </a:effectLst>
+        </p:spPr>
+        <p:style>
+          <a:lnRef idx="1">
+            <a:schemeClr val="accent1"/>
+          </a:lnRef>
+          <a:fillRef idx="3">
+            <a:schemeClr val="accent1"/>
+          </a:fillRef>
+          <a:effectRef idx="2">
+            <a:schemeClr val="accent1"/>
+          </a:effectRef>
+          <a:fontRef idx="minor">
+            <a:schemeClr val="lt1"/>
+          </a:fontRef>
+        </p:style>
+        <p:txBody>
+          <a:bodyPr rtlCol="0" anchor="ctr"/>
+          <a:lstStyle/>
+          <a:p>
+            <a:pPr algn="ctr"/>
+          </a:p>
+        </p:txBody>
+      </p:sp>
+      <p:pic>
+        <p:nvPicPr>
+          <p:cNvPr id="8" name="Picture 7" descr="project5.jpg"/>
+          <p:cNvPicPr>
+            <a:picLocks noChangeAspect="1"/>
+          </p:cNvPicPr>
+          <p:nvPr/>
+        </p:nvPicPr>
+        <p:blipFill>
+          <a:blip r:embed="rId2"/>
+          <a:stretch>
+            <a:fillRect/>
+          </a:stretch>
+        </p:blipFill>
+        <p:spPr>
+          <a:xfrm>
+            <a:off x="8826703" y="2105392"/>
+            <a:ext cx="2523744" cy="3561615"/>
+          </a:xfrm>
+          <a:prstGeom prst="rect">
+            <a:avLst/>
+          </a:prstGeom>
+        </p:spPr>
+      </p:pic>
     </p:spTree>
   </p:cSld>
   <p:clrMapOvr>
